--- a/training/slides/Module_04_Screening_Designs.pptx
+++ b/training/slides/Module_04_Screening_Designs.pptx
@@ -15,9 +15,6 @@
     <p:sldId id="263" r:id="rId14"/>
     <p:sldId id="264" r:id="rId15"/>
     <p:sldId id="265" r:id="rId16"/>
-    <p:sldId id="266" r:id="rId17"/>
-    <p:sldId id="267" r:id="rId18"/>
-    <p:sldId id="268" r:id="rId19"/>
   </p:sldIdLst>
   <p:sldSz cx="12191695" cy="6858000" type="screen4x3"/>
   <p:notesSz cx="6858000" cy="9144000"/>
@@ -3096,7 +3093,7 @@
     <p:bg>
       <p:bgPr>
         <a:solidFill>
-          <a:srgbClr val="1A1A2E"/>
+          <a:srgbClr val="1E1B4B"/>
         </a:solidFill>
         <a:effectLst/>
       </p:bgPr>
@@ -3117,13 +3114,13 @@
         <p:spPr>
           <a:xfrm>
             <a:off x="0" y="0"/>
-            <a:ext cx="137160" cy="6858000"/>
+            <a:ext cx="5943600" cy="6858000"/>
           </a:xfrm>
           <a:prstGeom prst="rect">
             <a:avLst/>
           </a:prstGeom>
           <a:solidFill>
-            <a:srgbClr val="007BFF"/>
+            <a:srgbClr val="1E1B4B"/>
           </a:solidFill>
           <a:ln>
             <a:noFill/>
@@ -3153,50 +3150,288 @@
       </p:sp>
       <p:sp>
         <p:nvSpPr>
-          <p:cNvPr id="3" name="TextBox 2"/>
+          <p:cNvPr id="3" name="Rectangle 2"/>
+          <p:cNvSpPr/>
+          <p:nvPr/>
+        </p:nvSpPr>
+        <p:spPr>
+          <a:xfrm>
+            <a:off x="5943600" y="0"/>
+            <a:ext cx="3200400" cy="6858000"/>
+          </a:xfrm>
+          <a:prstGeom prst="rect">
+            <a:avLst/>
+          </a:prstGeom>
+          <a:solidFill>
+            <a:srgbClr val="312E81"/>
+          </a:solidFill>
+          <a:ln>
+            <a:noFill/>
+          </a:ln>
+        </p:spPr>
+        <p:style>
+          <a:lnRef idx="1">
+            <a:schemeClr val="accent1"/>
+          </a:lnRef>
+          <a:fillRef idx="3">
+            <a:schemeClr val="accent1"/>
+          </a:fillRef>
+          <a:effectRef idx="2">
+            <a:schemeClr val="accent1"/>
+          </a:effectRef>
+          <a:fontRef idx="minor">
+            <a:schemeClr val="lt1"/>
+          </a:fontRef>
+        </p:style>
+        <p:txBody>
+          <a:bodyPr rtlCol="0" anchor="ctr"/>
+          <a:lstStyle/>
+          <a:p>
+            <a:pPr algn="ctr"/>
+          </a:p>
+        </p:txBody>
+      </p:sp>
+      <p:sp>
+        <p:nvSpPr>
+          <p:cNvPr id="4" name="Rectangle 3"/>
+          <p:cNvSpPr/>
+          <p:nvPr/>
+        </p:nvSpPr>
+        <p:spPr>
+          <a:xfrm>
+            <a:off x="9144000" y="0"/>
+            <a:ext cx="3047695" cy="6858000"/>
+          </a:xfrm>
+          <a:prstGeom prst="rect">
+            <a:avLst/>
+          </a:prstGeom>
+          <a:solidFill>
+            <a:srgbClr val="4338CA"/>
+          </a:solidFill>
+          <a:ln>
+            <a:noFill/>
+          </a:ln>
+        </p:spPr>
+        <p:style>
+          <a:lnRef idx="1">
+            <a:schemeClr val="accent1"/>
+          </a:lnRef>
+          <a:fillRef idx="3">
+            <a:schemeClr val="accent1"/>
+          </a:fillRef>
+          <a:effectRef idx="2">
+            <a:schemeClr val="accent1"/>
+          </a:effectRef>
+          <a:fontRef idx="minor">
+            <a:schemeClr val="lt1"/>
+          </a:fontRef>
+        </p:style>
+        <p:txBody>
+          <a:bodyPr rtlCol="0" anchor="ctr"/>
+          <a:lstStyle/>
+          <a:p>
+            <a:pPr algn="ctr"/>
+          </a:p>
+        </p:txBody>
+      </p:sp>
+      <p:sp>
+        <p:nvSpPr>
+          <p:cNvPr id="5" name="Rectangle 4"/>
+          <p:cNvSpPr/>
+          <p:nvPr/>
+        </p:nvSpPr>
+        <p:spPr>
+          <a:xfrm>
+            <a:off x="0" y="0"/>
+            <a:ext cx="73152" cy="6858000"/>
+          </a:xfrm>
+          <a:prstGeom prst="rect">
+            <a:avLst/>
+          </a:prstGeom>
+          <a:solidFill>
+            <a:srgbClr val="6366F1"/>
+          </a:solidFill>
+          <a:ln>
+            <a:noFill/>
+          </a:ln>
+        </p:spPr>
+        <p:style>
+          <a:lnRef idx="1">
+            <a:schemeClr val="accent1"/>
+          </a:lnRef>
+          <a:fillRef idx="3">
+            <a:schemeClr val="accent1"/>
+          </a:fillRef>
+          <a:effectRef idx="2">
+            <a:schemeClr val="accent1"/>
+          </a:effectRef>
+          <a:fontRef idx="minor">
+            <a:schemeClr val="lt1"/>
+          </a:fontRef>
+        </p:style>
+        <p:txBody>
+          <a:bodyPr rtlCol="0" anchor="ctr"/>
+          <a:lstStyle/>
+          <a:p>
+            <a:pPr algn="ctr"/>
+          </a:p>
+        </p:txBody>
+      </p:sp>
+      <p:sp>
+        <p:nvSpPr>
+          <p:cNvPr id="6" name="Oval 5"/>
+          <p:cNvSpPr/>
+          <p:nvPr/>
+        </p:nvSpPr>
+        <p:spPr>
+          <a:xfrm>
+            <a:off x="8229600" y="-914400"/>
+            <a:ext cx="4572000" cy="4572000"/>
+          </a:xfrm>
+          <a:prstGeom prst="ellipse">
+            <a:avLst/>
+          </a:prstGeom>
+          <a:solidFill>
+            <a:srgbClr val="6366F1">
+              <a:lumMod val="70000"/>
+              <a:lumOff val="30000"/>
+            </a:srgbClr>
+          </a:solidFill>
+          <a:ln>
+            <a:noFill/>
+          </a:ln>
+        </p:spPr>
+        <p:style>
+          <a:lnRef idx="1">
+            <a:schemeClr val="accent1"/>
+          </a:lnRef>
+          <a:fillRef idx="3">
+            <a:schemeClr val="accent1"/>
+          </a:fillRef>
+          <a:effectRef idx="2">
+            <a:schemeClr val="accent1"/>
+          </a:effectRef>
+          <a:fontRef idx="minor">
+            <a:schemeClr val="lt1"/>
+          </a:fontRef>
+        </p:style>
+        <p:txBody>
+          <a:bodyPr rtlCol="0" anchor="ctr"/>
+          <a:lstStyle/>
+          <a:p>
+            <a:pPr algn="ctr"/>
+          </a:p>
+        </p:txBody>
+      </p:sp>
+      <p:sp>
+        <p:nvSpPr>
+          <p:cNvPr id="7" name="Oval 6"/>
+          <p:cNvSpPr/>
+          <p:nvPr/>
+        </p:nvSpPr>
+        <p:spPr>
+          <a:xfrm>
+            <a:off x="-914400" y="3657600"/>
+            <a:ext cx="3657600" cy="3657600"/>
+          </a:xfrm>
+          <a:prstGeom prst="ellipse">
+            <a:avLst/>
+          </a:prstGeom>
+          <a:solidFill>
+            <a:srgbClr val="5046E5">
+              <a:lumMod val="60000"/>
+              <a:lumOff val="40000"/>
+            </a:srgbClr>
+          </a:solidFill>
+          <a:ln>
+            <a:noFill/>
+          </a:ln>
+        </p:spPr>
+        <p:style>
+          <a:lnRef idx="1">
+            <a:schemeClr val="accent1"/>
+          </a:lnRef>
+          <a:fillRef idx="3">
+            <a:schemeClr val="accent1"/>
+          </a:fillRef>
+          <a:effectRef idx="2">
+            <a:schemeClr val="accent1"/>
+          </a:effectRef>
+          <a:fontRef idx="minor">
+            <a:schemeClr val="lt1"/>
+          </a:fontRef>
+        </p:style>
+        <p:txBody>
+          <a:bodyPr rtlCol="0" anchor="ctr"/>
+          <a:lstStyle/>
+          <a:p>
+            <a:pPr algn="ctr"/>
+          </a:p>
+        </p:txBody>
+      </p:sp>
+      <p:sp>
+        <p:nvSpPr>
+          <p:cNvPr id="8" name="Rounded Rectangle 7"/>
+          <p:cNvSpPr/>
+          <p:nvPr/>
+        </p:nvSpPr>
+        <p:spPr>
+          <a:xfrm>
+            <a:off x="914400" y="1371600"/>
+            <a:ext cx="2377440" cy="438912"/>
+          </a:xfrm>
+          <a:prstGeom prst="roundRect">
+            <a:avLst/>
+          </a:prstGeom>
+          <a:solidFill>
+            <a:srgbClr val="312E81"/>
+          </a:solidFill>
+          <a:ln>
+            <a:noFill/>
+          </a:ln>
+        </p:spPr>
+        <p:style>
+          <a:lnRef idx="1">
+            <a:schemeClr val="accent1"/>
+          </a:lnRef>
+          <a:fillRef idx="3">
+            <a:schemeClr val="accent1"/>
+          </a:fillRef>
+          <a:effectRef idx="2">
+            <a:schemeClr val="accent1"/>
+          </a:effectRef>
+          <a:fontRef idx="minor">
+            <a:schemeClr val="lt1"/>
+          </a:fontRef>
+        </p:style>
+        <p:txBody>
+          <a:bodyPr rtlCol="0" anchor="ctr" lIns="137160"/>
+          <a:lstStyle/>
+          <a:p>
+            <a:pPr algn="l">
+              <a:defRPr sz="1400" b="1">
+                <a:solidFill>
+                  <a:srgbClr val="C7D2FE"/>
+                </a:solidFill>
+                <a:latin typeface="Consolas"/>
+              </a:defRPr>
+            </a:pPr>
+            <a:r>
+              <a:t>MODULE 4</a:t>
+            </a:r>
+          </a:p>
+        </p:txBody>
+      </p:sp>
+      <p:sp>
+        <p:nvSpPr>
+          <p:cNvPr id="9" name="TextBox 8"/>
           <p:cNvSpPr txBox="1"/>
           <p:nvPr/>
         </p:nvSpPr>
         <p:spPr>
           <a:xfrm>
-            <a:off x="914400" y="1097280"/>
-            <a:ext cx="10058400" cy="731520"/>
-          </a:xfrm>
-          <a:prstGeom prst="rect">
-            <a:avLst/>
-          </a:prstGeom>
-          <a:noFill/>
-        </p:spPr>
-        <p:txBody>
-          <a:bodyPr wrap="none">
-            <a:spAutoFit/>
-          </a:bodyPr>
-          <a:lstStyle/>
-          <a:p>
-            <a:pPr>
-              <a:defRPr sz="2000" b="1">
-                <a:solidFill>
-                  <a:srgbClr val="007BFF"/>
-                </a:solidFill>
-                <a:latin typeface="Calibri"/>
-              </a:defRPr>
-            </a:pPr>
-            <a:r>
-              <a:t>MODULE 4</a:t>
-            </a:r>
-          </a:p>
-        </p:txBody>
-      </p:sp>
-      <p:sp>
-        <p:nvSpPr>
-          <p:cNvPr id="4" name="TextBox 3"/>
-          <p:cNvSpPr txBox="1"/>
-          <p:nvPr/>
-        </p:nvSpPr>
-        <p:spPr>
-          <a:xfrm>
-            <a:off x="914400" y="2011680"/>
-            <a:ext cx="10058400" cy="1828800"/>
+            <a:off x="914400" y="2286000"/>
+            <a:ext cx="9144000" cy="2011680"/>
           </a:xfrm>
           <a:prstGeom prst="rect">
             <a:avLst/>
@@ -3209,30 +3444,34 @@
           </a:bodyPr>
           <a:lstStyle/>
           <a:p>
-            <a:pPr>
-              <a:defRPr sz="4400" b="1">
+            <a:pPr algn="l">
+              <a:defRPr sz="4000" b="1">
                 <a:solidFill>
                   <a:srgbClr val="FFFFFF"/>
                 </a:solidFill>
-                <a:latin typeface="Calibri"/>
-              </a:defRPr>
-            </a:pPr>
-            <a:r>
-              <a:t>Fractional Factorial &amp; Screening Designs</a:t>
-            </a:r>
-          </a:p>
-        </p:txBody>
-      </p:sp>
-      <p:sp>
-        <p:nvSpPr>
-          <p:cNvPr id="5" name="TextBox 4"/>
+                <a:latin typeface="Inter"/>
+              </a:defRPr>
+            </a:pPr>
+            <a:r>
+              <a:t>Fractional Factorial &amp;</a:t>
+            </a:r>
+            <a:br/>
+            <a:r>
+              <a:t>Screening Designs</a:t>
+            </a:r>
+          </a:p>
+        </p:txBody>
+      </p:sp>
+      <p:sp>
+        <p:nvSpPr>
+          <p:cNvPr id="10" name="TextBox 9"/>
           <p:cNvSpPr txBox="1"/>
           <p:nvPr/>
         </p:nvSpPr>
         <p:spPr>
           <a:xfrm>
-            <a:off x="914400" y="4114800"/>
-            <a:ext cx="9144000" cy="1371600"/>
+            <a:off x="914400" y="4389120"/>
+            <a:ext cx="8686800" cy="1371600"/>
           </a:xfrm>
           <a:prstGeom prst="rect">
             <a:avLst/>
@@ -3245,12 +3484,12 @@
           </a:bodyPr>
           <a:lstStyle/>
           <a:p>
-            <a:pPr>
-              <a:defRPr sz="2200">
-                <a:solidFill>
-                  <a:srgbClr val="CCCCCC"/>
-                </a:solidFill>
-                <a:latin typeface="Calibri"/>
+            <a:pPr algn="l">
+              <a:defRPr sz="1900" b="0">
+                <a:solidFill>
+                  <a:srgbClr val="A5B4FC"/>
+                </a:solidFill>
+                <a:latin typeface="Inter"/>
               </a:defRPr>
             </a:pPr>
             <a:r>
@@ -3261,14 +3500,14 @@
       </p:sp>
       <p:sp>
         <p:nvSpPr>
-          <p:cNvPr id="6" name="TextBox 5"/>
+          <p:cNvPr id="11" name="TextBox 10"/>
           <p:cNvSpPr txBox="1"/>
           <p:nvPr/>
         </p:nvSpPr>
         <p:spPr>
           <a:xfrm>
-            <a:off x="914400" y="6126480"/>
-            <a:ext cx="10058400" cy="457200"/>
+            <a:off x="731520" y="6400800"/>
+            <a:ext cx="10058400" cy="365760"/>
           </a:xfrm>
           <a:prstGeom prst="rect">
             <a:avLst/>
@@ -3281,16 +3520,16 @@
           </a:bodyPr>
           <a:lstStyle/>
           <a:p>
-            <a:pPr>
-              <a:defRPr sz="1200">
-                <a:solidFill>
-                  <a:srgbClr val="888888"/>
-                </a:solidFill>
-                <a:latin typeface="Calibri"/>
-              </a:defRPr>
-            </a:pPr>
-            <a:r>
-              <a:t>Copyright © 2026 Martin J. Gallagher. Licensed under GPL-3.0-or-later.</a:t>
+            <a:pPr algn="l">
+              <a:defRPr sz="1000" b="0">
+                <a:solidFill>
+                  <a:srgbClr val="6366F1"/>
+                </a:solidFill>
+                <a:latin typeface="Consolas"/>
+              </a:defRPr>
+            </a:pPr>
+            <a:r>
+              <a:t>© 2026 Martin J. Gallagher  |  GPL-3.0-or-later  |  doehelper.com</a:t>
             </a:r>
           </a:p>
         </p:txBody>
@@ -3309,7 +3548,7 @@
     <p:bg>
       <p:bgPr>
         <a:solidFill>
-          <a:srgbClr val="FFFFFF"/>
+          <a:srgbClr val="FAFAFA"/>
         </a:solidFill>
         <a:effectLst/>
       </p:bgPr>
@@ -3330,13 +3569,13 @@
         <p:spPr>
           <a:xfrm>
             <a:off x="0" y="0"/>
-            <a:ext cx="12191695" cy="54864"/>
+            <a:ext cx="12191695" cy="45720"/>
           </a:xfrm>
           <a:prstGeom prst="rect">
             <a:avLst/>
           </a:prstGeom>
           <a:solidFill>
-            <a:srgbClr val="007BFF"/>
+            <a:srgbClr val="D97706"/>
           </a:solidFill>
           <a:ln>
             <a:noFill/>
@@ -3366,482 +3605,20 @@
       </p:sp>
       <p:sp>
         <p:nvSpPr>
-          <p:cNvPr id="3" name="TextBox 2"/>
-          <p:cNvSpPr txBox="1"/>
-          <p:nvPr/>
-        </p:nvSpPr>
-        <p:spPr>
-          <a:xfrm>
-            <a:off x="731520" y="365760"/>
-            <a:ext cx="10515600" cy="822960"/>
-          </a:xfrm>
-          <a:prstGeom prst="rect">
-            <a:avLst/>
-          </a:prstGeom>
-          <a:noFill/>
-        </p:spPr>
-        <p:txBody>
-          <a:bodyPr wrap="none">
-            <a:spAutoFit/>
-          </a:bodyPr>
-          <a:lstStyle/>
-          <a:p>
-            <a:pPr>
-              <a:defRPr sz="3200" b="1">
-                <a:solidFill>
-                  <a:srgbClr val="222222"/>
-                </a:solidFill>
-                <a:latin typeface="Calibri"/>
-              </a:defRPr>
-            </a:pPr>
-            <a:r>
-              <a:t>The Screening Workflow</a:t>
-            </a:r>
-          </a:p>
-        </p:txBody>
-      </p:sp>
-      <p:sp>
-        <p:nvSpPr>
-          <p:cNvPr id="4" name="TextBox 3"/>
-          <p:cNvSpPr txBox="1"/>
-          <p:nvPr/>
-        </p:nvSpPr>
-        <p:spPr>
-          <a:xfrm>
-            <a:off x="731520" y="1280160"/>
-            <a:ext cx="5029200" cy="457200"/>
-          </a:xfrm>
-          <a:prstGeom prst="rect">
-            <a:avLst/>
-          </a:prstGeom>
-          <a:noFill/>
-        </p:spPr>
-        <p:txBody>
-          <a:bodyPr wrap="none">
-            <a:spAutoFit/>
-          </a:bodyPr>
-          <a:lstStyle/>
-          <a:p>
-            <a:pPr>
-              <a:defRPr sz="2200" b="1">
-                <a:solidFill>
-                  <a:srgbClr val="007BFF"/>
-                </a:solidFill>
-                <a:latin typeface="Calibri"/>
-              </a:defRPr>
-            </a:pPr>
-            <a:r>
-              <a:t>Screen &amp; Characterise</a:t>
-            </a:r>
-          </a:p>
-        </p:txBody>
-      </p:sp>
-      <p:sp>
-        <p:nvSpPr>
-          <p:cNvPr id="5" name="TextBox 4"/>
-          <p:cNvSpPr txBox="1"/>
-          <p:nvPr/>
-        </p:nvSpPr>
-        <p:spPr>
-          <a:xfrm>
-            <a:off x="731520" y="1828800"/>
-            <a:ext cx="5029200" cy="4572000"/>
-          </a:xfrm>
-          <a:prstGeom prst="rect">
-            <a:avLst/>
-          </a:prstGeom>
-          <a:noFill/>
-        </p:spPr>
-        <p:txBody>
-          <a:bodyPr wrap="square">
-            <a:spAutoFit/>
-          </a:bodyPr>
-          <a:lstStyle/>
-          <a:p>
-            <a:pPr>
-              <a:spcAft>
-                <a:spcPts val="600"/>
-              </a:spcAft>
-              <a:defRPr sz="2000">
-                <a:solidFill>
-                  <a:srgbClr val="222222"/>
-                </a:solidFill>
-                <a:latin typeface="Calibri"/>
-              </a:defRPr>
-            </a:pPr>
-            <a:r>
-              <a:t>Phase 1: Screen</a:t>
-            </a:r>
-          </a:p>
-          <a:p>
-            <a:pPr>
-              <a:spcAft>
-                <a:spcPts val="600"/>
-              </a:spcAft>
-              <a:defRPr sz="2000">
-                <a:solidFill>
-                  <a:srgbClr val="222222"/>
-                </a:solidFill>
-                <a:latin typeface="Calibri"/>
-              </a:defRPr>
-            </a:pPr>
-            <a:r>
-              <a:t>  Run PB or DSD with all candidate factors</a:t>
-            </a:r>
-          </a:p>
-          <a:p>
-            <a:pPr>
-              <a:spcAft>
-                <a:spcPts val="600"/>
-              </a:spcAft>
-              <a:defRPr sz="2000">
-                <a:solidFill>
-                  <a:srgbClr val="222222"/>
-                </a:solidFill>
-                <a:latin typeface="Calibri"/>
-              </a:defRPr>
-            </a:pPr>
-            <a:r>
-              <a:t>  Identify 3-5 significant factors</a:t>
-            </a:r>
-          </a:p>
-          <a:p>
-            <a:pPr>
-              <a:spcAft>
-                <a:spcPts val="600"/>
-              </a:spcAft>
-              <a:defRPr sz="2000">
-                <a:solidFill>
-                  <a:srgbClr val="222222"/>
-                </a:solidFill>
-                <a:latin typeface="Calibri"/>
-              </a:defRPr>
-            </a:pPr>
-            <a:r>
-              <a:t>  Drop non-significant factors</a:t>
-            </a:r>
-          </a:p>
-          <a:p>
-            <a:pPr>
-              <a:spcAft>
-                <a:spcPts val="600"/>
-              </a:spcAft>
-              <a:defRPr sz="2000">
-                <a:solidFill>
-                  <a:srgbClr val="222222"/>
-                </a:solidFill>
-                <a:latin typeface="Calibri"/>
-              </a:defRPr>
-            </a:pPr>
-          </a:p>
-          <a:p>
-            <a:pPr>
-              <a:spcAft>
-                <a:spcPts val="600"/>
-              </a:spcAft>
-              <a:defRPr sz="2000">
-                <a:solidFill>
-                  <a:srgbClr val="222222"/>
-                </a:solidFill>
-                <a:latin typeface="Calibri"/>
-              </a:defRPr>
-            </a:pPr>
-            <a:r>
-              <a:t>Phase 2: Characterise</a:t>
-            </a:r>
-          </a:p>
-          <a:p>
-            <a:pPr>
-              <a:spcAft>
-                <a:spcPts val="600"/>
-              </a:spcAft>
-              <a:defRPr sz="2000">
-                <a:solidFill>
-                  <a:srgbClr val="222222"/>
-                </a:solidFill>
-                <a:latin typeface="Calibri"/>
-              </a:defRPr>
-            </a:pPr>
-            <a:r>
-              <a:t>  Full factorial on surviving factors</a:t>
-            </a:r>
-          </a:p>
-          <a:p>
-            <a:pPr>
-              <a:spcAft>
-                <a:spcPts val="600"/>
-              </a:spcAft>
-              <a:defRPr sz="2000">
-                <a:solidFill>
-                  <a:srgbClr val="222222"/>
-                </a:solidFill>
-                <a:latin typeface="Calibri"/>
-              </a:defRPr>
-            </a:pPr>
-            <a:r>
-              <a:t>  Estimate all interactions</a:t>
-            </a:r>
-          </a:p>
-          <a:p>
-            <a:pPr>
-              <a:spcAft>
-                <a:spcPts val="600"/>
-              </a:spcAft>
-              <a:defRPr sz="2000">
-                <a:solidFill>
-                  <a:srgbClr val="222222"/>
-                </a:solidFill>
-                <a:latin typeface="Calibri"/>
-              </a:defRPr>
-            </a:pPr>
-            <a:r>
-              <a:t>  Check for curvature</a:t>
-            </a:r>
-          </a:p>
-        </p:txBody>
-      </p:sp>
-      <p:sp>
-        <p:nvSpPr>
-          <p:cNvPr id="6" name="TextBox 5"/>
-          <p:cNvSpPr txBox="1"/>
-          <p:nvPr/>
-        </p:nvSpPr>
-        <p:spPr>
-          <a:xfrm>
-            <a:off x="6400800" y="1280160"/>
-            <a:ext cx="5029200" cy="457200"/>
-          </a:xfrm>
-          <a:prstGeom prst="rect">
-            <a:avLst/>
-          </a:prstGeom>
-          <a:noFill/>
-        </p:spPr>
-        <p:txBody>
-          <a:bodyPr wrap="none">
-            <a:spAutoFit/>
-          </a:bodyPr>
-          <a:lstStyle/>
-          <a:p>
-            <a:pPr>
-              <a:defRPr sz="2200" b="1">
-                <a:solidFill>
-                  <a:srgbClr val="00C853"/>
-                </a:solidFill>
-                <a:latin typeface="Calibri"/>
-              </a:defRPr>
-            </a:pPr>
-            <a:r>
-              <a:t>Optimise</a:t>
-            </a:r>
-          </a:p>
-        </p:txBody>
-      </p:sp>
-      <p:sp>
-        <p:nvSpPr>
-          <p:cNvPr id="7" name="TextBox 6"/>
-          <p:cNvSpPr txBox="1"/>
-          <p:nvPr/>
-        </p:nvSpPr>
-        <p:spPr>
-          <a:xfrm>
-            <a:off x="6400800" y="1828800"/>
-            <a:ext cx="5029200" cy="4572000"/>
-          </a:xfrm>
-          <a:prstGeom prst="rect">
-            <a:avLst/>
-          </a:prstGeom>
-          <a:noFill/>
-        </p:spPr>
-        <p:txBody>
-          <a:bodyPr wrap="square">
-            <a:spAutoFit/>
-          </a:bodyPr>
-          <a:lstStyle/>
-          <a:p>
-            <a:pPr>
-              <a:spcAft>
-                <a:spcPts val="600"/>
-              </a:spcAft>
-              <a:defRPr sz="2000">
-                <a:solidFill>
-                  <a:srgbClr val="222222"/>
-                </a:solidFill>
-                <a:latin typeface="Calibri"/>
-              </a:defRPr>
-            </a:pPr>
-            <a:r>
-              <a:t>Phase 3: Optimise</a:t>
-            </a:r>
-          </a:p>
-          <a:p>
-            <a:pPr>
-              <a:spcAft>
-                <a:spcPts val="600"/>
-              </a:spcAft>
-              <a:defRPr sz="2000">
-                <a:solidFill>
-                  <a:srgbClr val="222222"/>
-                </a:solidFill>
-                <a:latin typeface="Calibri"/>
-              </a:defRPr>
-            </a:pPr>
-            <a:r>
-              <a:t>  Response surface design (CCD, BBD)</a:t>
-            </a:r>
-          </a:p>
-          <a:p>
-            <a:pPr>
-              <a:spcAft>
-                <a:spcPts val="600"/>
-              </a:spcAft>
-              <a:defRPr sz="2000">
-                <a:solidFill>
-                  <a:srgbClr val="222222"/>
-                </a:solidFill>
-                <a:latin typeface="Calibri"/>
-              </a:defRPr>
-            </a:pPr>
-            <a:r>
-              <a:t>  Model the response surface</a:t>
-            </a:r>
-          </a:p>
-          <a:p>
-            <a:pPr>
-              <a:spcAft>
-                <a:spcPts val="600"/>
-              </a:spcAft>
-              <a:defRPr sz="2000">
-                <a:solidFill>
-                  <a:srgbClr val="222222"/>
-                </a:solidFill>
-                <a:latin typeface="Calibri"/>
-              </a:defRPr>
-            </a:pPr>
-            <a:r>
-              <a:t>  Find the optimum settings</a:t>
-            </a:r>
-          </a:p>
-          <a:p>
-            <a:pPr>
-              <a:spcAft>
-                <a:spcPts val="600"/>
-              </a:spcAft>
-              <a:defRPr sz="2000">
-                <a:solidFill>
-                  <a:srgbClr val="222222"/>
-                </a:solidFill>
-                <a:latin typeface="Calibri"/>
-              </a:defRPr>
-            </a:pPr>
-          </a:p>
-          <a:p>
-            <a:pPr>
-              <a:spcAft>
-                <a:spcPts val="600"/>
-              </a:spcAft>
-              <a:defRPr sz="2000">
-                <a:solidFill>
-                  <a:srgbClr val="222222"/>
-                </a:solidFill>
-                <a:latin typeface="Calibri"/>
-              </a:defRPr>
-            </a:pPr>
-            <a:r>
-              <a:t>doe-helper supports all phases:</a:t>
-            </a:r>
-          </a:p>
-          <a:p>
-            <a:pPr>
-              <a:spcAft>
-                <a:spcPts val="600"/>
-              </a:spcAft>
-              <a:defRPr sz="2000">
-                <a:solidFill>
-                  <a:srgbClr val="222222"/>
-                </a:solidFill>
-                <a:latin typeface="Calibri"/>
-              </a:defRPr>
-            </a:pPr>
-            <a:r>
-              <a:t>  doe generate -&gt; doe analyze</a:t>
-            </a:r>
-          </a:p>
-          <a:p>
-            <a:pPr>
-              <a:spcAft>
-                <a:spcPts val="600"/>
-              </a:spcAft>
-              <a:defRPr sz="2000">
-                <a:solidFill>
-                  <a:srgbClr val="222222"/>
-                </a:solidFill>
-                <a:latin typeface="Calibri"/>
-              </a:defRPr>
-            </a:pPr>
-            <a:r>
-              <a:t>  doe augment for fold-overs</a:t>
-            </a:r>
-          </a:p>
-          <a:p>
-            <a:pPr>
-              <a:spcAft>
-                <a:spcPts val="600"/>
-              </a:spcAft>
-              <a:defRPr sz="2000">
-                <a:solidFill>
-                  <a:srgbClr val="222222"/>
-                </a:solidFill>
-                <a:latin typeface="Calibri"/>
-              </a:defRPr>
-            </a:pPr>
-            <a:r>
-              <a:t>  doe optimize for final settings</a:t>
-            </a:r>
-          </a:p>
-        </p:txBody>
-      </p:sp>
-    </p:spTree>
-  </p:cSld>
-  <p:clrMapOvr>
-    <a:masterClrMapping/>
-  </p:clrMapOvr>
-</p:sld>
-</file>
-
-<file path=ppt/slides/slide11.xml><?xml version="1.0" encoding="utf-8"?>
-<p:sld xmlns:a="http://schemas.openxmlformats.org/drawingml/2006/main" xmlns:p="http://schemas.openxmlformats.org/presentationml/2006/main" xmlns:r="http://schemas.openxmlformats.org/officeDocument/2006/relationships">
-  <p:cSld>
-    <p:bg>
-      <p:bgPr>
-        <a:solidFill>
-          <a:srgbClr val="FFFFFF"/>
-        </a:solidFill>
-        <a:effectLst/>
-      </p:bgPr>
-    </p:bg>
-    <p:spTree>
-      <p:nvGrpSpPr>
-        <p:cNvPr id="1" name=""/>
-        <p:cNvGrpSpPr/>
-        <p:nvPr/>
-      </p:nvGrpSpPr>
-      <p:grpSpPr/>
-      <p:sp>
-        <p:nvSpPr>
-          <p:cNvPr id="2" name="Rectangle 1"/>
+          <p:cNvPr id="3" name="Rounded Rectangle 2"/>
           <p:cNvSpPr/>
           <p:nvPr/>
         </p:nvSpPr>
         <p:spPr>
           <a:xfrm>
-            <a:off x="0" y="0"/>
-            <a:ext cx="12191695" cy="54864"/>
-          </a:xfrm>
-          <a:prstGeom prst="rect">
+            <a:off x="548640" y="274320"/>
+            <a:ext cx="2194560" cy="457200"/>
+          </a:xfrm>
+          <a:prstGeom prst="roundRect">
             <a:avLst/>
           </a:prstGeom>
           <a:solidFill>
-            <a:srgbClr val="00C853"/>
+            <a:srgbClr val="D97706"/>
           </a:solidFill>
           <a:ln>
             <a:noFill/>
@@ -3865,20 +3642,30 @@
           <a:bodyPr rtlCol="0" anchor="ctr"/>
           <a:lstStyle/>
           <a:p>
-            <a:pPr algn="ctr"/>
-          </a:p>
-        </p:txBody>
-      </p:sp>
-      <p:sp>
-        <p:nvSpPr>
-          <p:cNvPr id="3" name="TextBox 2"/>
+            <a:pPr algn="ctr">
+              <a:defRPr sz="1300" b="1">
+                <a:solidFill>
+                  <a:srgbClr val="FFFFFF"/>
+                </a:solidFill>
+                <a:latin typeface="Consolas"/>
+              </a:defRPr>
+            </a:pPr>
+            <a:r>
+              <a:t>HANDS-ON EXERCISE</a:t>
+            </a:r>
+          </a:p>
+        </p:txBody>
+      </p:sp>
+      <p:sp>
+        <p:nvSpPr>
+          <p:cNvPr id="4" name="TextBox 3"/>
           <p:cNvSpPr txBox="1"/>
           <p:nvPr/>
         </p:nvSpPr>
         <p:spPr>
           <a:xfrm>
-            <a:off x="731520" y="365760"/>
-            <a:ext cx="10515600" cy="822960"/>
+            <a:off x="3017520" y="274320"/>
+            <a:ext cx="8229600" cy="548640"/>
           </a:xfrm>
           <a:prstGeom prst="rect">
             <a:avLst/>
@@ -3891,36 +3678,36 @@
           </a:bodyPr>
           <a:lstStyle/>
           <a:p>
-            <a:pPr>
-              <a:defRPr sz="3000" b="1">
-                <a:solidFill>
-                  <a:srgbClr val="222222"/>
-                </a:solidFill>
-                <a:latin typeface="Calibri"/>
-              </a:defRPr>
-            </a:pPr>
-            <a:r>
-              <a:t>Fold-Over with doe augment</a:t>
-            </a:r>
-          </a:p>
-        </p:txBody>
-      </p:sp>
-      <p:sp>
-        <p:nvSpPr>
-          <p:cNvPr id="4" name="Rounded Rectangle 3"/>
+            <a:pPr algn="l">
+              <a:defRPr sz="2600" b="1">
+                <a:solidFill>
+                  <a:srgbClr val="111111"/>
+                </a:solidFill>
+                <a:latin typeface="Inter"/>
+              </a:defRPr>
+            </a:pPr>
+            <a:r>
+              <a:t>Exercise 4: Screening a Microservice</a:t>
+            </a:r>
+          </a:p>
+        </p:txBody>
+      </p:sp>
+      <p:sp>
+        <p:nvSpPr>
+          <p:cNvPr id="5" name="Rounded Rectangle 4"/>
           <p:cNvSpPr/>
           <p:nvPr/>
         </p:nvSpPr>
         <p:spPr>
           <a:xfrm>
-            <a:off x="731520" y="1371600"/>
-            <a:ext cx="10515600" cy="4114800"/>
+            <a:off x="548640" y="1005840"/>
+            <a:ext cx="10972800" cy="5120640"/>
           </a:xfrm>
           <a:prstGeom prst="roundRect">
             <a:avLst/>
           </a:prstGeom>
           <a:solidFill>
-            <a:srgbClr val="2D2D2D"/>
+            <a:srgbClr val="FFFBEB"/>
           </a:solidFill>
           <a:ln>
             <a:noFill/>
@@ -3941,262 +3728,29 @@
           </a:fontRef>
         </p:style>
         <p:txBody>
-          <a:bodyPr rtlCol="0" anchor="ctr" wrap="square" lIns="274320" tIns="274320"/>
-          <a:lstStyle/>
-          <a:p>
-            <a:pPr algn="ctr">
-              <a:spcAft>
-                <a:spcPts val="200"/>
-              </a:spcAft>
-              <a:defRPr sz="1800">
-                <a:solidFill>
-                  <a:srgbClr val="D4D4D4"/>
-                </a:solidFill>
-                <a:latin typeface="Consolas"/>
-              </a:defRPr>
-            </a:pPr>
-            <a:r>
-              <a:t># After screening, if you need to de-alias effects:</a:t>
-            </a:r>
-          </a:p>
-          <a:p>
-            <a:pPr>
-              <a:spcAft>
-                <a:spcPts val="200"/>
-              </a:spcAft>
-              <a:defRPr sz="1800">
-                <a:solidFill>
-                  <a:srgbClr val="D4D4D4"/>
-                </a:solidFill>
-                <a:latin typeface="Consolas"/>
-              </a:defRPr>
-            </a:pPr>
-            <a:r>
-              <a:t>$ doe augment api_screening/ --method fold-over</a:t>
-            </a:r>
-          </a:p>
-          <a:p>
-            <a:pPr>
-              <a:spcAft>
-                <a:spcPts val="200"/>
-              </a:spcAft>
-              <a:defRPr sz="1800">
-                <a:solidFill>
-                  <a:srgbClr val="D4D4D4"/>
-                </a:solidFill>
-                <a:latin typeface="Consolas"/>
-              </a:defRPr>
-            </a:pPr>
-          </a:p>
-          <a:p>
-            <a:pPr>
-              <a:spcAft>
-                <a:spcPts val="200"/>
-              </a:spcAft>
-              <a:defRPr sz="1800">
-                <a:solidFill>
-                  <a:srgbClr val="D4D4D4"/>
-                </a:solidFill>
-                <a:latin typeface="Consolas"/>
-              </a:defRPr>
-            </a:pPr>
-            <a:r>
-              <a:t># This mirrors the original design to break aliases</a:t>
-            </a:r>
-          </a:p>
-          <a:p>
-            <a:pPr>
-              <a:spcAft>
-                <a:spcPts val="200"/>
-              </a:spcAft>
-              <a:defRPr sz="1800">
-                <a:solidFill>
-                  <a:srgbClr val="D4D4D4"/>
-                </a:solidFill>
-                <a:latin typeface="Consolas"/>
-              </a:defRPr>
-            </a:pPr>
-            <a:r>
-              <a:t># Doubles the run count but separates confounded effects</a:t>
-            </a:r>
-          </a:p>
-          <a:p>
-            <a:pPr>
-              <a:spcAft>
-                <a:spcPts val="200"/>
-              </a:spcAft>
-              <a:defRPr sz="1800">
-                <a:solidFill>
-                  <a:srgbClr val="D4D4D4"/>
-                </a:solidFill>
-                <a:latin typeface="Consolas"/>
-              </a:defRPr>
-            </a:pPr>
-          </a:p>
-          <a:p>
-            <a:pPr>
-              <a:spcAft>
-                <a:spcPts val="200"/>
-              </a:spcAft>
-              <a:defRPr sz="1800">
-                <a:solidFill>
-                  <a:srgbClr val="D4D4D4"/>
-                </a:solidFill>
-                <a:latin typeface="Consolas"/>
-              </a:defRPr>
-            </a:pPr>
-            <a:r>
-              <a:t># Other augmentation methods:</a:t>
-            </a:r>
-          </a:p>
-          <a:p>
-            <a:pPr>
-              <a:spcAft>
-                <a:spcPts val="200"/>
-              </a:spcAft>
-              <a:defRPr sz="1800">
-                <a:solidFill>
-                  <a:srgbClr val="D4D4D4"/>
-                </a:solidFill>
-                <a:latin typeface="Consolas"/>
-              </a:defRPr>
-            </a:pPr>
-            <a:r>
-              <a:t>$ doe augment experiment/ --method center-points --count 5</a:t>
-            </a:r>
-          </a:p>
-          <a:p>
-            <a:pPr>
-              <a:spcAft>
-                <a:spcPts val="200"/>
-              </a:spcAft>
-              <a:defRPr sz="1800">
-                <a:solidFill>
-                  <a:srgbClr val="D4D4D4"/>
-                </a:solidFill>
-                <a:latin typeface="Consolas"/>
-              </a:defRPr>
-            </a:pPr>
-            <a:r>
-              <a:t>$ doe augment experiment/ --method star-points  # for CCD</a:t>
-            </a:r>
-          </a:p>
-        </p:txBody>
-      </p:sp>
-      <p:sp>
-        <p:nvSpPr>
-          <p:cNvPr id="5" name="TextBox 4"/>
-          <p:cNvSpPr txBox="1"/>
-          <p:nvPr/>
-        </p:nvSpPr>
-        <p:spPr>
-          <a:xfrm>
-            <a:off x="731520" y="5760720"/>
-            <a:ext cx="10058400" cy="731520"/>
-          </a:xfrm>
-          <a:prstGeom prst="rect">
-            <a:avLst/>
-          </a:prstGeom>
-          <a:noFill/>
-        </p:spPr>
-        <p:txBody>
-          <a:bodyPr wrap="square">
-            <a:spAutoFit/>
-          </a:bodyPr>
-          <a:lstStyle/>
-          <a:p>
-            <a:pPr>
-              <a:defRPr sz="1600" i="1">
-                <a:solidFill>
-                  <a:srgbClr val="666666"/>
-                </a:solidFill>
-                <a:latin typeface="Calibri"/>
-              </a:defRPr>
-            </a:pPr>
-            <a:r>
-              <a:t>doe augment extends an existing design without starting over</a:t>
-            </a:r>
-          </a:p>
-        </p:txBody>
-      </p:sp>
-    </p:spTree>
-  </p:cSld>
-  <p:clrMapOvr>
-    <a:masterClrMapping/>
-  </p:clrMapOvr>
-</p:sld>
-</file>
-
-<file path=ppt/slides/slide12.xml><?xml version="1.0" encoding="utf-8"?>
-<p:sld xmlns:a="http://schemas.openxmlformats.org/drawingml/2006/main" xmlns:p="http://schemas.openxmlformats.org/presentationml/2006/main" xmlns:r="http://schemas.openxmlformats.org/officeDocument/2006/relationships">
-  <p:cSld>
-    <p:bg>
-      <p:bgPr>
-        <a:solidFill>
-          <a:srgbClr val="1A1A2E"/>
-        </a:solidFill>
-        <a:effectLst/>
-      </p:bgPr>
-    </p:bg>
-    <p:spTree>
-      <p:nvGrpSpPr>
-        <p:cNvPr id="1" name=""/>
-        <p:cNvGrpSpPr/>
-        <p:nvPr/>
-      </p:nvGrpSpPr>
-      <p:grpSpPr/>
-      <p:sp>
-        <p:nvSpPr>
-          <p:cNvPr id="2" name="TextBox 1"/>
-          <p:cNvSpPr txBox="1"/>
-          <p:nvPr/>
-        </p:nvSpPr>
-        <p:spPr>
-          <a:xfrm>
-            <a:off x="731520" y="457200"/>
-            <a:ext cx="10515600" cy="914400"/>
-          </a:xfrm>
-          <a:prstGeom prst="rect">
-            <a:avLst/>
-          </a:prstGeom>
-          <a:noFill/>
-        </p:spPr>
-        <p:txBody>
-          <a:bodyPr wrap="none">
-            <a:spAutoFit/>
-          </a:bodyPr>
-          <a:lstStyle/>
-          <a:p>
-            <a:pPr>
-              <a:defRPr sz="3400" b="1">
-                <a:solidFill>
-                  <a:srgbClr val="FFFFFF"/>
-                </a:solidFill>
-                <a:latin typeface="Calibri"/>
-              </a:defRPr>
-            </a:pPr>
-            <a:r>
-              <a:t>Key Takeaways</a:t>
-            </a:r>
-          </a:p>
-        </p:txBody>
-      </p:sp>
-      <p:sp>
-        <p:nvSpPr>
-          <p:cNvPr id="3" name="Rounded Rectangle 2"/>
+          <a:bodyPr rtlCol="0" anchor="ctr"/>
+          <a:lstStyle/>
+          <a:p>
+            <a:pPr algn="ctr"/>
+          </a:p>
+        </p:txBody>
+      </p:sp>
+      <p:sp>
+        <p:nvSpPr>
+          <p:cNvPr id="6" name="Rectangle 5"/>
           <p:cNvSpPr/>
           <p:nvPr/>
         </p:nvSpPr>
         <p:spPr>
           <a:xfrm>
-            <a:off x="731520" y="1645920"/>
-            <a:ext cx="10515600" cy="822960"/>
-          </a:xfrm>
-          <a:prstGeom prst="roundRect">
+            <a:off x="548640" y="1005840"/>
+            <a:ext cx="36576" cy="5120640"/>
+          </a:xfrm>
+          <a:prstGeom prst="rect">
             <a:avLst/>
           </a:prstGeom>
           <a:solidFill>
-            <a:srgbClr val="2A2A4A"/>
+            <a:srgbClr val="D97706"/>
           </a:solidFill>
           <a:ln>
             <a:noFill/>
@@ -4217,297 +3771,6 @@
           </a:fontRef>
         </p:style>
         <p:txBody>
-          <a:bodyPr rtlCol="0" anchor="ctr" lIns="274320"/>
-          <a:lstStyle/>
-          <a:p>
-            <a:pPr algn="ctr">
-              <a:defRPr sz="2200">
-                <a:solidFill>
-                  <a:srgbClr val="FFFFFF"/>
-                </a:solidFill>
-                <a:latin typeface="Calibri"/>
-              </a:defRPr>
-            </a:pPr>
-            <a:r>
-              <a:t>Fractional factorials trade runs for information (aliasing)</a:t>
-            </a:r>
-          </a:p>
-        </p:txBody>
-      </p:sp>
-      <p:sp>
-        <p:nvSpPr>
-          <p:cNvPr id="4" name="Rounded Rectangle 3"/>
-          <p:cNvSpPr/>
-          <p:nvPr/>
-        </p:nvSpPr>
-        <p:spPr>
-          <a:xfrm>
-            <a:off x="731520" y="2606040"/>
-            <a:ext cx="10515600" cy="822960"/>
-          </a:xfrm>
-          <a:prstGeom prst="roundRect">
-            <a:avLst/>
-          </a:prstGeom>
-          <a:solidFill>
-            <a:srgbClr val="2A2A4A"/>
-          </a:solidFill>
-          <a:ln>
-            <a:noFill/>
-          </a:ln>
-        </p:spPr>
-        <p:style>
-          <a:lnRef idx="1">
-            <a:schemeClr val="accent1"/>
-          </a:lnRef>
-          <a:fillRef idx="3">
-            <a:schemeClr val="accent1"/>
-          </a:fillRef>
-          <a:effectRef idx="2">
-            <a:schemeClr val="accent1"/>
-          </a:effectRef>
-          <a:fontRef idx="minor">
-            <a:schemeClr val="lt1"/>
-          </a:fontRef>
-        </p:style>
-        <p:txBody>
-          <a:bodyPr rtlCol="0" anchor="ctr" lIns="274320"/>
-          <a:lstStyle/>
-          <a:p>
-            <a:pPr algn="ctr">
-              <a:defRPr sz="2200">
-                <a:solidFill>
-                  <a:srgbClr val="FFFFFF"/>
-                </a:solidFill>
-                <a:latin typeface="Calibri"/>
-              </a:defRPr>
-            </a:pPr>
-            <a:r>
-              <a:t>Resolution tells you what's confounded with what</a:t>
-            </a:r>
-          </a:p>
-        </p:txBody>
-      </p:sp>
-      <p:sp>
-        <p:nvSpPr>
-          <p:cNvPr id="5" name="Rounded Rectangle 4"/>
-          <p:cNvSpPr/>
-          <p:nvPr/>
-        </p:nvSpPr>
-        <p:spPr>
-          <a:xfrm>
-            <a:off x="731520" y="3566160"/>
-            <a:ext cx="10515600" cy="822960"/>
-          </a:xfrm>
-          <a:prstGeom prst="roundRect">
-            <a:avLst/>
-          </a:prstGeom>
-          <a:solidFill>
-            <a:srgbClr val="2A2A4A"/>
-          </a:solidFill>
-          <a:ln>
-            <a:noFill/>
-          </a:ln>
-        </p:spPr>
-        <p:style>
-          <a:lnRef idx="1">
-            <a:schemeClr val="accent1"/>
-          </a:lnRef>
-          <a:fillRef idx="3">
-            <a:schemeClr val="accent1"/>
-          </a:fillRef>
-          <a:effectRef idx="2">
-            <a:schemeClr val="accent1"/>
-          </a:effectRef>
-          <a:fontRef idx="minor">
-            <a:schemeClr val="lt1"/>
-          </a:fontRef>
-        </p:style>
-        <p:txBody>
-          <a:bodyPr rtlCol="0" anchor="ctr" lIns="274320"/>
-          <a:lstStyle/>
-          <a:p>
-            <a:pPr algn="ctr">
-              <a:defRPr sz="2200">
-                <a:solidFill>
-                  <a:srgbClr val="FFFFFF"/>
-                </a:solidFill>
-                <a:latin typeface="Calibri"/>
-              </a:defRPr>
-            </a:pPr>
-            <a:r>
-              <a:t>Plackett-Burman: maximum screening efficiency</a:t>
-            </a:r>
-          </a:p>
-        </p:txBody>
-      </p:sp>
-      <p:sp>
-        <p:nvSpPr>
-          <p:cNvPr id="6" name="Rounded Rectangle 5"/>
-          <p:cNvSpPr/>
-          <p:nvPr/>
-        </p:nvSpPr>
-        <p:spPr>
-          <a:xfrm>
-            <a:off x="731520" y="4526280"/>
-            <a:ext cx="10515600" cy="822960"/>
-          </a:xfrm>
-          <a:prstGeom prst="roundRect">
-            <a:avLst/>
-          </a:prstGeom>
-          <a:solidFill>
-            <a:srgbClr val="2A2A4A"/>
-          </a:solidFill>
-          <a:ln>
-            <a:noFill/>
-          </a:ln>
-        </p:spPr>
-        <p:style>
-          <a:lnRef idx="1">
-            <a:schemeClr val="accent1"/>
-          </a:lnRef>
-          <a:fillRef idx="3">
-            <a:schemeClr val="accent1"/>
-          </a:fillRef>
-          <a:effectRef idx="2">
-            <a:schemeClr val="accent1"/>
-          </a:effectRef>
-          <a:fontRef idx="minor">
-            <a:schemeClr val="lt1"/>
-          </a:fontRef>
-        </p:style>
-        <p:txBody>
-          <a:bodyPr rtlCol="0" anchor="ctr" lIns="274320"/>
-          <a:lstStyle/>
-          <a:p>
-            <a:pPr algn="ctr">
-              <a:defRPr sz="2200">
-                <a:solidFill>
-                  <a:srgbClr val="FFFFFF"/>
-                </a:solidFill>
-                <a:latin typeface="Calibri"/>
-              </a:defRPr>
-            </a:pPr>
-            <a:r>
-              <a:t>Definitive Screening: modern, cleaner main-effect estimates</a:t>
-            </a:r>
-          </a:p>
-        </p:txBody>
-      </p:sp>
-      <p:sp>
-        <p:nvSpPr>
-          <p:cNvPr id="7" name="Rounded Rectangle 6"/>
-          <p:cNvSpPr/>
-          <p:nvPr/>
-        </p:nvSpPr>
-        <p:spPr>
-          <a:xfrm>
-            <a:off x="731520" y="5486400"/>
-            <a:ext cx="10515600" cy="822960"/>
-          </a:xfrm>
-          <a:prstGeom prst="roundRect">
-            <a:avLst/>
-          </a:prstGeom>
-          <a:solidFill>
-            <a:srgbClr val="2A2A4A"/>
-          </a:solidFill>
-          <a:ln>
-            <a:noFill/>
-          </a:ln>
-        </p:spPr>
-        <p:style>
-          <a:lnRef idx="1">
-            <a:schemeClr val="accent1"/>
-          </a:lnRef>
-          <a:fillRef idx="3">
-            <a:schemeClr val="accent1"/>
-          </a:fillRef>
-          <a:effectRef idx="2">
-            <a:schemeClr val="accent1"/>
-          </a:effectRef>
-          <a:fontRef idx="minor">
-            <a:schemeClr val="lt1"/>
-          </a:fontRef>
-        </p:style>
-        <p:txBody>
-          <a:bodyPr rtlCol="0" anchor="ctr" lIns="274320"/>
-          <a:lstStyle/>
-          <a:p>
-            <a:pPr algn="ctr">
-              <a:defRPr sz="2200">
-                <a:solidFill>
-                  <a:srgbClr val="FFFFFF"/>
-                </a:solidFill>
-                <a:latin typeface="Calibri"/>
-              </a:defRPr>
-            </a:pPr>
-            <a:r>
-              <a:t>doe-helper automates design selection and fold-overs</a:t>
-            </a:r>
-          </a:p>
-        </p:txBody>
-      </p:sp>
-    </p:spTree>
-  </p:cSld>
-  <p:clrMapOvr>
-    <a:masterClrMapping/>
-  </p:clrMapOvr>
-</p:sld>
-</file>
-
-<file path=ppt/slides/slide13.xml><?xml version="1.0" encoding="utf-8"?>
-<p:sld xmlns:a="http://schemas.openxmlformats.org/drawingml/2006/main" xmlns:p="http://schemas.openxmlformats.org/presentationml/2006/main" xmlns:r="http://schemas.openxmlformats.org/officeDocument/2006/relationships">
-  <p:cSld>
-    <p:bg>
-      <p:bgPr>
-        <a:solidFill>
-          <a:srgbClr val="FFFFFF"/>
-        </a:solidFill>
-        <a:effectLst/>
-      </p:bgPr>
-    </p:bg>
-    <p:spTree>
-      <p:nvGrpSpPr>
-        <p:cNvPr id="1" name=""/>
-        <p:cNvGrpSpPr/>
-        <p:nvPr/>
-      </p:nvGrpSpPr>
-      <p:grpSpPr/>
-      <p:sp>
-        <p:nvSpPr>
-          <p:cNvPr id="2" name="Rectangle 1"/>
-          <p:cNvSpPr/>
-          <p:nvPr/>
-        </p:nvSpPr>
-        <p:spPr>
-          <a:xfrm>
-            <a:off x="0" y="0"/>
-            <a:ext cx="12191695" cy="54864"/>
-          </a:xfrm>
-          <a:prstGeom prst="rect">
-            <a:avLst/>
-          </a:prstGeom>
-          <a:solidFill>
-            <a:srgbClr val="FF8C00"/>
-          </a:solidFill>
-          <a:ln>
-            <a:noFill/>
-          </a:ln>
-        </p:spPr>
-        <p:style>
-          <a:lnRef idx="1">
-            <a:schemeClr val="accent1"/>
-          </a:lnRef>
-          <a:fillRef idx="3">
-            <a:schemeClr val="accent1"/>
-          </a:fillRef>
-          <a:effectRef idx="2">
-            <a:schemeClr val="accent1"/>
-          </a:effectRef>
-          <a:fontRef idx="minor">
-            <a:schemeClr val="lt1"/>
-          </a:fontRef>
-        </p:style>
-        <p:txBody>
           <a:bodyPr rtlCol="0" anchor="ctr"/>
           <a:lstStyle/>
           <a:p>
@@ -4517,103 +3780,14 @@
       </p:sp>
       <p:sp>
         <p:nvSpPr>
-          <p:cNvPr id="3" name="Rounded Rectangle 2"/>
-          <p:cNvSpPr/>
-          <p:nvPr/>
-        </p:nvSpPr>
-        <p:spPr>
-          <a:xfrm>
-            <a:off x="731520" y="320040"/>
-            <a:ext cx="2011680" cy="502920"/>
-          </a:xfrm>
-          <a:prstGeom prst="roundRect">
-            <a:avLst/>
-          </a:prstGeom>
-          <a:solidFill>
-            <a:srgbClr val="FF8C00"/>
-          </a:solidFill>
-          <a:ln>
-            <a:noFill/>
-          </a:ln>
-        </p:spPr>
-        <p:style>
-          <a:lnRef idx="1">
-            <a:schemeClr val="accent1"/>
-          </a:lnRef>
-          <a:fillRef idx="3">
-            <a:schemeClr val="accent1"/>
-          </a:fillRef>
-          <a:effectRef idx="2">
-            <a:schemeClr val="accent1"/>
-          </a:effectRef>
-          <a:fontRef idx="minor">
-            <a:schemeClr val="lt1"/>
-          </a:fontRef>
-        </p:style>
-        <p:txBody>
-          <a:bodyPr rtlCol="0" anchor="ctr"/>
-          <a:lstStyle/>
-          <a:p>
-            <a:pPr algn="ctr">
-              <a:defRPr sz="1400" b="1">
-                <a:solidFill>
-                  <a:srgbClr val="FFFFFF"/>
-                </a:solidFill>
-                <a:latin typeface="Calibri"/>
-              </a:defRPr>
-            </a:pPr>
-            <a:r>
-              <a:t>HANDS-ON EXERCISE</a:t>
-            </a:r>
-          </a:p>
-        </p:txBody>
-      </p:sp>
-      <p:sp>
-        <p:nvSpPr>
-          <p:cNvPr id="4" name="TextBox 3"/>
+          <p:cNvPr id="7" name="TextBox 6"/>
           <p:cNvSpPr txBox="1"/>
           <p:nvPr/>
         </p:nvSpPr>
         <p:spPr>
           <a:xfrm>
-            <a:off x="3017520" y="320040"/>
-            <a:ext cx="8229600" cy="731520"/>
-          </a:xfrm>
-          <a:prstGeom prst="rect">
-            <a:avLst/>
-          </a:prstGeom>
-          <a:noFill/>
-        </p:spPr>
-        <p:txBody>
-          <a:bodyPr wrap="none">
-            <a:spAutoFit/>
-          </a:bodyPr>
-          <a:lstStyle/>
-          <a:p>
-            <a:pPr>
-              <a:defRPr sz="3000" b="1">
-                <a:solidFill>
-                  <a:srgbClr val="222222"/>
-                </a:solidFill>
-                <a:latin typeface="Calibri"/>
-              </a:defRPr>
-            </a:pPr>
-            <a:r>
-              <a:t>Exercise 4: Screening a Microservice</a:t>
-            </a:r>
-          </a:p>
-        </p:txBody>
-      </p:sp>
-      <p:sp>
-        <p:nvSpPr>
-          <p:cNvPr id="5" name="TextBox 4"/>
-          <p:cNvSpPr txBox="1"/>
-          <p:nvPr/>
-        </p:nvSpPr>
-        <p:spPr>
-          <a:xfrm>
-            <a:off x="914400" y="1371600"/>
-            <a:ext cx="10058400" cy="5029200"/>
+            <a:off x="822960" y="1143000"/>
+            <a:ext cx="10424160" cy="4846320"/>
           </a:xfrm>
           <a:prstGeom prst="rect">
             <a:avLst/>
@@ -4628,13 +3802,13 @@
           <a:p>
             <a:pPr>
               <a:spcAft>
-                <a:spcPts val="600"/>
+                <a:spcPts val="500"/>
               </a:spcAft>
-              <a:defRPr sz="2000">
-                <a:solidFill>
-                  <a:srgbClr val="222222"/>
-                </a:solidFill>
-                <a:latin typeface="Calibri"/>
+              <a:defRPr sz="1700">
+                <a:solidFill>
+                  <a:srgbClr val="333333"/>
+                </a:solidFill>
+                <a:latin typeface="Inter"/>
               </a:defRPr>
             </a:pPr>
             <a:r>
@@ -4644,174 +3818,194 @@
           <a:p>
             <a:pPr>
               <a:spcAft>
-                <a:spcPts val="600"/>
+                <a:spcPts val="500"/>
               </a:spcAft>
-              <a:defRPr sz="2000">
-                <a:solidFill>
-                  <a:srgbClr val="222222"/>
-                </a:solidFill>
-                <a:latin typeface="Calibri"/>
+              <a:defRPr sz="1700">
+                <a:solidFill>
+                  <a:srgbClr val="333333"/>
+                </a:solidFill>
+                <a:latin typeface="Inter"/>
               </a:defRPr>
             </a:pPr>
           </a:p>
           <a:p>
             <a:pPr>
               <a:spcAft>
-                <a:spcPts val="600"/>
+                <a:spcPts val="500"/>
               </a:spcAft>
-              <a:defRPr sz="2000">
-                <a:solidFill>
-                  <a:srgbClr val="222222"/>
-                </a:solidFill>
-                <a:latin typeface="Calibri"/>
-              </a:defRPr>
-            </a:pPr>
-            <a:r>
-              <a:t>1. Create config.json with 8 continuous factors of your choice</a:t>
+              <a:defRPr sz="1700">
+                <a:solidFill>
+                  <a:srgbClr val="333333"/>
+                </a:solidFill>
+                <a:latin typeface="Inter"/>
+              </a:defRPr>
+            </a:pPr>
+            <a:r>
+              <a:t>1. Create config.json with 8 continuous factors</a:t>
+            </a:r>
+          </a:p>
+          <a:p>
+            <a:pPr>
+              <a:spcAft>
+                <a:spcPts val="500"/>
+              </a:spcAft>
+              <a:defRPr sz="1700">
+                <a:solidFill>
+                  <a:srgbClr val="333333"/>
+                </a:solidFill>
+                <a:latin typeface="Inter"/>
+              </a:defRPr>
+            </a:pPr>
+            <a:r>
+              <a:t>2. Set design type to "plackett_burman"</a:t>
+            </a:r>
+          </a:p>
+          <a:p>
+            <a:pPr>
+              <a:spcAft>
+                <a:spcPts val="500"/>
+              </a:spcAft>
+              <a:defRPr sz="1700">
+                <a:solidFill>
+                  <a:srgbClr val="333333"/>
+                </a:solidFill>
+                <a:latin typeface="Inter"/>
+              </a:defRPr>
+            </a:pPr>
+            <a:r>
+              <a:t>3. Run:  doe generate microservice/</a:t>
             </a:r>
           </a:p>
           <a:p>
             <a:pPr lvl="1">
               <a:spcAft>
-                <a:spcPts val="600"/>
+                <a:spcPts val="500"/>
               </a:spcAft>
-              <a:defRPr sz="1800">
-                <a:solidFill>
-                  <a:srgbClr val="222222"/>
-                </a:solidFill>
-                <a:latin typeface="Calibri"/>
-              </a:defRPr>
-            </a:pPr>
-            <a:r>
-              <a:t>(e.g. connection_pool, timeout, retries, batch_size, ...)</a:t>
+              <a:defRPr sz="1500">
+                <a:solidFill>
+                  <a:srgbClr val="666666"/>
+                </a:solidFill>
+                <a:latin typeface="Inter"/>
+              </a:defRPr>
+            </a:pPr>
+            <a:r>
+              <a:t>How many runs does the design require?</a:t>
             </a:r>
           </a:p>
           <a:p>
             <a:pPr>
               <a:spcAft>
-                <a:spcPts val="600"/>
+                <a:spcPts val="500"/>
               </a:spcAft>
-              <a:defRPr sz="2000">
-                <a:solidFill>
-                  <a:srgbClr val="222222"/>
-                </a:solidFill>
-                <a:latin typeface="Calibri"/>
-              </a:defRPr>
-            </a:pPr>
-            <a:r>
-              <a:t>2. Set design type to "plackett_burman"</a:t>
+              <a:defRPr sz="1700">
+                <a:solidFill>
+                  <a:srgbClr val="333333"/>
+                </a:solidFill>
+                <a:latin typeface="Inter"/>
+              </a:defRPr>
+            </a:pPr>
+            <a:r>
+              <a:t>4. Compare: change to "definitive_screening"</a:t>
+            </a:r>
+          </a:p>
+          <a:p>
+            <a:pPr lvl="1">
+              <a:spcAft>
+                <a:spcPts val="500"/>
+              </a:spcAft>
+              <a:defRPr sz="1500">
+                <a:solidFill>
+                  <a:srgbClr val="666666"/>
+                </a:solidFill>
+                <a:latin typeface="Inter"/>
+              </a:defRPr>
+            </a:pPr>
+            <a:r>
+              <a:t>How many runs now? What's different?</a:t>
             </a:r>
           </a:p>
           <a:p>
             <a:pPr>
               <a:spcAft>
-                <a:spcPts val="600"/>
+                <a:spcPts val="500"/>
               </a:spcAft>
-              <a:defRPr sz="2000">
-                <a:solidFill>
-                  <a:srgbClr val="222222"/>
-                </a:solidFill>
-                <a:latin typeface="Calibri"/>
-              </a:defRPr>
-            </a:pPr>
-            <a:r>
-              <a:t>3. Run: doe generate microservice/</a:t>
-            </a:r>
-          </a:p>
-          <a:p>
-            <a:pPr lvl="1">
-              <a:spcAft>
-                <a:spcPts val="600"/>
-              </a:spcAft>
-              <a:defRPr sz="1800">
-                <a:solidFill>
-                  <a:srgbClr val="222222"/>
-                </a:solidFill>
-                <a:latin typeface="Calibri"/>
-              </a:defRPr>
-            </a:pPr>
-            <a:r>
-              <a:t>How many runs does the design require?</a:t>
+              <a:defRPr sz="1700">
+                <a:solidFill>
+                  <a:srgbClr val="333333"/>
+                </a:solidFill>
+                <a:latin typeface="Inter"/>
+              </a:defRPr>
+            </a:pPr>
+            <a:r>
+              <a:t>5. Run the simulation and analyse results</a:t>
             </a:r>
           </a:p>
           <a:p>
             <a:pPr>
               <a:spcAft>
-                <a:spcPts val="600"/>
+                <a:spcPts val="500"/>
               </a:spcAft>
-              <a:defRPr sz="2000">
-                <a:solidFill>
-                  <a:srgbClr val="222222"/>
-                </a:solidFill>
-                <a:latin typeface="Calibri"/>
-              </a:defRPr>
-            </a:pPr>
-            <a:r>
-              <a:t>4. Run: doe info microservice/</a:t>
+              <a:defRPr sz="1700">
+                <a:solidFill>
+                  <a:srgbClr val="333333"/>
+                </a:solidFill>
+                <a:latin typeface="Inter"/>
+              </a:defRPr>
+            </a:pPr>
+            <a:r>
+              <a:t>6. Which factors appear significant?</a:t>
             </a:r>
           </a:p>
           <a:p>
             <a:pPr>
               <a:spcAft>
-                <a:spcPts val="600"/>
+                <a:spcPts val="500"/>
               </a:spcAft>
-              <a:defRPr sz="2000">
-                <a:solidFill>
-                  <a:srgbClr val="222222"/>
-                </a:solidFill>
-                <a:latin typeface="Calibri"/>
-              </a:defRPr>
-            </a:pPr>
-            <a:r>
-              <a:t>5. Compare: change design type to "definitive_screening"</a:t>
-            </a:r>
-          </a:p>
-          <a:p>
-            <a:pPr lvl="1">
-              <a:spcAft>
-                <a:spcPts val="600"/>
-              </a:spcAft>
-              <a:defRPr sz="1800">
-                <a:solidFill>
-                  <a:srgbClr val="222222"/>
-                </a:solidFill>
-                <a:latin typeface="Calibri"/>
-              </a:defRPr>
-            </a:pPr>
-            <a:r>
-              <a:t>How many runs now? What's different?</a:t>
-            </a:r>
-          </a:p>
-          <a:p>
-            <a:pPr>
-              <a:spcAft>
-                <a:spcPts val="600"/>
-              </a:spcAft>
-              <a:defRPr sz="2000">
-                <a:solidFill>
-                  <a:srgbClr val="222222"/>
-                </a:solidFill>
-                <a:latin typeface="Calibri"/>
-              </a:defRPr>
-            </a:pPr>
-            <a:r>
-              <a:t>6. Run the simulation and analyse results</a:t>
-            </a:r>
-          </a:p>
-          <a:p>
-            <a:pPr>
-              <a:spcAft>
-                <a:spcPts val="600"/>
-              </a:spcAft>
-              <a:defRPr sz="2000">
-                <a:solidFill>
-                  <a:srgbClr val="222222"/>
-                </a:solidFill>
-                <a:latin typeface="Calibri"/>
-              </a:defRPr>
-            </a:pPr>
-            <a:r>
-              <a:t>7. Which factors appear significant? Plan a follow-up design.</a:t>
+              <a:defRPr sz="1700">
+                <a:solidFill>
+                  <a:srgbClr val="333333"/>
+                </a:solidFill>
+                <a:latin typeface="Inter"/>
+              </a:defRPr>
+            </a:pPr>
+            <a:r>
+              <a:t>7. Plan a follow-up design with the significant factors</a:t>
+            </a:r>
+          </a:p>
+        </p:txBody>
+      </p:sp>
+      <p:sp>
+        <p:nvSpPr>
+          <p:cNvPr id="8" name="TextBox 7"/>
+          <p:cNvSpPr txBox="1"/>
+          <p:nvPr/>
+        </p:nvSpPr>
+        <p:spPr>
+          <a:xfrm>
+            <a:off x="731520" y="6400800"/>
+            <a:ext cx="10058400" cy="365760"/>
+          </a:xfrm>
+          <a:prstGeom prst="rect">
+            <a:avLst/>
+          </a:prstGeom>
+          <a:noFill/>
+        </p:spPr>
+        <p:txBody>
+          <a:bodyPr wrap="square">
+            <a:spAutoFit/>
+          </a:bodyPr>
+          <a:lstStyle/>
+          <a:p>
+            <a:pPr algn="l">
+              <a:defRPr sz="1000" b="0">
+                <a:solidFill>
+                  <a:srgbClr val="999999"/>
+                </a:solidFill>
+                <a:latin typeface="Consolas"/>
+              </a:defRPr>
+            </a:pPr>
+            <a:r>
+              <a:t>© 2026 Martin J. Gallagher  |  GPL-3.0-or-later  |  doehelper.com</a:t>
             </a:r>
           </a:p>
         </p:txBody>
@@ -4830,7 +4024,7 @@
     <p:bg>
       <p:bgPr>
         <a:solidFill>
-          <a:srgbClr val="FFFFFF"/>
+          <a:srgbClr val="FAFAFA"/>
         </a:solidFill>
         <a:effectLst/>
       </p:bgPr>
@@ -4851,13 +4045,13 @@
         <p:spPr>
           <a:xfrm>
             <a:off x="0" y="0"/>
-            <a:ext cx="12191695" cy="54864"/>
+            <a:ext cx="12191695" cy="45720"/>
           </a:xfrm>
           <a:prstGeom prst="rect">
             <a:avLst/>
           </a:prstGeom>
           <a:solidFill>
-            <a:srgbClr val="007BFF"/>
+            <a:srgbClr val="5046E5"/>
           </a:solidFill>
           <a:ln>
             <a:noFill/>
@@ -4887,14 +4081,57 @@
       </p:sp>
       <p:sp>
         <p:nvSpPr>
-          <p:cNvPr id="3" name="TextBox 2"/>
+          <p:cNvPr id="3" name="Rectangle 2"/>
+          <p:cNvSpPr/>
+          <p:nvPr/>
+        </p:nvSpPr>
+        <p:spPr>
+          <a:xfrm>
+            <a:off x="548640" y="411480"/>
+            <a:ext cx="36576" cy="502920"/>
+          </a:xfrm>
+          <a:prstGeom prst="rect">
+            <a:avLst/>
+          </a:prstGeom>
+          <a:solidFill>
+            <a:srgbClr val="5046E5"/>
+          </a:solidFill>
+          <a:ln>
+            <a:noFill/>
+          </a:ln>
+        </p:spPr>
+        <p:style>
+          <a:lnRef idx="1">
+            <a:schemeClr val="accent1"/>
+          </a:lnRef>
+          <a:fillRef idx="3">
+            <a:schemeClr val="accent1"/>
+          </a:fillRef>
+          <a:effectRef idx="2">
+            <a:schemeClr val="accent1"/>
+          </a:effectRef>
+          <a:fontRef idx="minor">
+            <a:schemeClr val="lt1"/>
+          </a:fontRef>
+        </p:style>
+        <p:txBody>
+          <a:bodyPr rtlCol="0" anchor="ctr"/>
+          <a:lstStyle/>
+          <a:p>
+            <a:pPr algn="ctr"/>
+          </a:p>
+        </p:txBody>
+      </p:sp>
+      <p:sp>
+        <p:nvSpPr>
+          <p:cNvPr id="4" name="TextBox 3"/>
           <p:cNvSpPr txBox="1"/>
           <p:nvPr/>
         </p:nvSpPr>
         <p:spPr>
           <a:xfrm>
-            <a:off x="731520" y="365760"/>
-            <a:ext cx="10515600" cy="822960"/>
+            <a:off x="777240" y="365760"/>
+            <a:ext cx="10058400" cy="640080"/>
           </a:xfrm>
           <a:prstGeom prst="rect">
             <a:avLst/>
@@ -4907,12 +4144,12 @@
           </a:bodyPr>
           <a:lstStyle/>
           <a:p>
-            <a:pPr>
-              <a:defRPr sz="3200" b="1">
-                <a:solidFill>
-                  <a:srgbClr val="222222"/>
-                </a:solidFill>
-                <a:latin typeface="Calibri"/>
+            <a:pPr algn="l">
+              <a:defRPr sz="2800" b="1">
+                <a:solidFill>
+                  <a:srgbClr val="111111"/>
+                </a:solidFill>
+                <a:latin typeface="Inter"/>
               </a:defRPr>
             </a:pPr>
             <a:r>
@@ -4923,14 +4160,14 @@
       </p:sp>
       <p:sp>
         <p:nvSpPr>
-          <p:cNvPr id="4" name="TextBox 3"/>
+          <p:cNvPr id="5" name="TextBox 4"/>
           <p:cNvSpPr txBox="1"/>
           <p:nvPr/>
         </p:nvSpPr>
         <p:spPr>
           <a:xfrm>
-            <a:off x="914400" y="1463040"/>
-            <a:ext cx="10058400" cy="4754880"/>
+            <a:off x="822960" y="1188720"/>
+            <a:ext cx="10241280" cy="5120640"/>
           </a:xfrm>
           <a:prstGeom prst="rect">
             <a:avLst/>
@@ -4945,13 +4182,13 @@
           <a:p>
             <a:pPr>
               <a:spcAft>
-                <a:spcPts val="800"/>
+                <a:spcPts val="600"/>
               </a:spcAft>
-              <a:defRPr sz="2200" b="0">
-                <a:solidFill>
-                  <a:srgbClr val="222222"/>
-                </a:solidFill>
-                <a:latin typeface="Calibri"/>
+              <a:defRPr sz="1900">
+                <a:solidFill>
+                  <a:srgbClr val="333333"/>
+                </a:solidFill>
+                <a:latin typeface="Inter"/>
               </a:defRPr>
             </a:pPr>
             <a:r>
@@ -4961,13 +4198,13 @@
           <a:p>
             <a:pPr>
               <a:spcAft>
-                <a:spcPts val="800"/>
+                <a:spcPts val="600"/>
               </a:spcAft>
-              <a:defRPr sz="2200" b="0">
-                <a:solidFill>
-                  <a:srgbClr val="222222"/>
-                </a:solidFill>
-                <a:latin typeface="Calibri"/>
+              <a:defRPr sz="1900">
+                <a:solidFill>
+                  <a:srgbClr val="333333"/>
+                </a:solidFill>
+                <a:latin typeface="Inter"/>
               </a:defRPr>
             </a:pPr>
             <a:r>
@@ -4977,13 +4214,13 @@
           <a:p>
             <a:pPr>
               <a:spcAft>
-                <a:spcPts val="800"/>
+                <a:spcPts val="600"/>
               </a:spcAft>
-              <a:defRPr sz="2200" b="0">
-                <a:solidFill>
-                  <a:srgbClr val="222222"/>
-                </a:solidFill>
-                <a:latin typeface="Calibri"/>
+              <a:defRPr sz="1900">
+                <a:solidFill>
+                  <a:srgbClr val="333333"/>
+                </a:solidFill>
+                <a:latin typeface="Inter"/>
               </a:defRPr>
             </a:pPr>
             <a:r>
@@ -4993,13 +4230,13 @@
           <a:p>
             <a:pPr>
               <a:spcAft>
-                <a:spcPts val="800"/>
+                <a:spcPts val="600"/>
               </a:spcAft>
-              <a:defRPr sz="2200" b="0">
-                <a:solidFill>
-                  <a:srgbClr val="222222"/>
-                </a:solidFill>
-                <a:latin typeface="Calibri"/>
+              <a:defRPr sz="1900">
+                <a:solidFill>
+                  <a:srgbClr val="333333"/>
+                </a:solidFill>
+                <a:latin typeface="Inter"/>
               </a:defRPr>
             </a:pPr>
             <a:r>
@@ -5009,13 +4246,13 @@
           <a:p>
             <a:pPr>
               <a:spcAft>
-                <a:spcPts val="800"/>
+                <a:spcPts val="600"/>
               </a:spcAft>
-              <a:defRPr sz="2200" b="0">
-                <a:solidFill>
-                  <a:srgbClr val="222222"/>
-                </a:solidFill>
-                <a:latin typeface="Calibri"/>
+              <a:defRPr sz="1900">
+                <a:solidFill>
+                  <a:srgbClr val="333333"/>
+                </a:solidFill>
+                <a:latin typeface="Inter"/>
               </a:defRPr>
             </a:pPr>
             <a:r>
@@ -5025,17 +4262,53 @@
           <a:p>
             <a:pPr>
               <a:spcAft>
-                <a:spcPts val="800"/>
+                <a:spcPts val="600"/>
               </a:spcAft>
-              <a:defRPr sz="2200" b="0">
-                <a:solidFill>
-                  <a:srgbClr val="222222"/>
-                </a:solidFill>
-                <a:latin typeface="Calibri"/>
+              <a:defRPr sz="1900">
+                <a:solidFill>
+                  <a:srgbClr val="333333"/>
+                </a:solidFill>
+                <a:latin typeface="Inter"/>
               </a:defRPr>
             </a:pPr>
             <a:r>
               <a:t>Plan a follow-up experiment after screening</a:t>
+            </a:r>
+          </a:p>
+        </p:txBody>
+      </p:sp>
+      <p:sp>
+        <p:nvSpPr>
+          <p:cNvPr id="6" name="TextBox 5"/>
+          <p:cNvSpPr txBox="1"/>
+          <p:nvPr/>
+        </p:nvSpPr>
+        <p:spPr>
+          <a:xfrm>
+            <a:off x="731520" y="6400800"/>
+            <a:ext cx="10058400" cy="365760"/>
+          </a:xfrm>
+          <a:prstGeom prst="rect">
+            <a:avLst/>
+          </a:prstGeom>
+          <a:noFill/>
+        </p:spPr>
+        <p:txBody>
+          <a:bodyPr wrap="square">
+            <a:spAutoFit/>
+          </a:bodyPr>
+          <a:lstStyle/>
+          <a:p>
+            <a:pPr algn="l">
+              <a:defRPr sz="1000" b="0">
+                <a:solidFill>
+                  <a:srgbClr val="999999"/>
+                </a:solidFill>
+                <a:latin typeface="Consolas"/>
+              </a:defRPr>
+            </a:pPr>
+            <a:r>
+              <a:t>© 2026 Martin J. Gallagher  |  GPL-3.0-or-later  |  doehelper.com</a:t>
             </a:r>
           </a:p>
         </p:txBody>
@@ -5054,7 +4327,7 @@
     <p:bg>
       <p:bgPr>
         <a:solidFill>
-          <a:srgbClr val="FFFFFF"/>
+          <a:srgbClr val="FAFAFA"/>
         </a:solidFill>
         <a:effectLst/>
       </p:bgPr>
@@ -5075,13 +4348,13 @@
         <p:spPr>
           <a:xfrm>
             <a:off x="0" y="0"/>
-            <a:ext cx="12191695" cy="54864"/>
+            <a:ext cx="12191695" cy="45720"/>
           </a:xfrm>
           <a:prstGeom prst="rect">
             <a:avLst/>
           </a:prstGeom>
           <a:solidFill>
-            <a:srgbClr val="007BFF"/>
+            <a:srgbClr val="5046E5"/>
           </a:solidFill>
           <a:ln>
             <a:noFill/>
@@ -5111,14 +4384,57 @@
       </p:sp>
       <p:sp>
         <p:nvSpPr>
-          <p:cNvPr id="3" name="TextBox 2"/>
+          <p:cNvPr id="3" name="Rectangle 2"/>
+          <p:cNvSpPr/>
+          <p:nvPr/>
+        </p:nvSpPr>
+        <p:spPr>
+          <a:xfrm>
+            <a:off x="548640" y="411480"/>
+            <a:ext cx="36576" cy="502920"/>
+          </a:xfrm>
+          <a:prstGeom prst="rect">
+            <a:avLst/>
+          </a:prstGeom>
+          <a:solidFill>
+            <a:srgbClr val="5046E5"/>
+          </a:solidFill>
+          <a:ln>
+            <a:noFill/>
+          </a:ln>
+        </p:spPr>
+        <p:style>
+          <a:lnRef idx="1">
+            <a:schemeClr val="accent1"/>
+          </a:lnRef>
+          <a:fillRef idx="3">
+            <a:schemeClr val="accent1"/>
+          </a:fillRef>
+          <a:effectRef idx="2">
+            <a:schemeClr val="accent1"/>
+          </a:effectRef>
+          <a:fontRef idx="minor">
+            <a:schemeClr val="lt1"/>
+          </a:fontRef>
+        </p:style>
+        <p:txBody>
+          <a:bodyPr rtlCol="0" anchor="ctr"/>
+          <a:lstStyle/>
+          <a:p>
+            <a:pPr algn="ctr"/>
+          </a:p>
+        </p:txBody>
+      </p:sp>
+      <p:sp>
+        <p:nvSpPr>
+          <p:cNvPr id="4" name="TextBox 3"/>
           <p:cNvSpPr txBox="1"/>
           <p:nvPr/>
         </p:nvSpPr>
         <p:spPr>
           <a:xfrm>
-            <a:off x="731520" y="365760"/>
-            <a:ext cx="10515600" cy="822960"/>
+            <a:off x="777240" y="365760"/>
+            <a:ext cx="10058400" cy="640080"/>
           </a:xfrm>
           <a:prstGeom prst="rect">
             <a:avLst/>
@@ -5131,12 +4447,12 @@
           </a:bodyPr>
           <a:lstStyle/>
           <a:p>
-            <a:pPr>
-              <a:defRPr sz="3200" b="1">
-                <a:solidFill>
-                  <a:srgbClr val="222222"/>
-                </a:solidFill>
-                <a:latin typeface="Calibri"/>
+            <a:pPr algn="l">
+              <a:defRPr sz="2800" b="1">
+                <a:solidFill>
+                  <a:srgbClr val="111111"/>
+                </a:solidFill>
+                <a:latin typeface="Inter"/>
               </a:defRPr>
             </a:pPr>
             <a:r>
@@ -5147,14 +4463,14 @@
       </p:sp>
       <p:sp>
         <p:nvSpPr>
-          <p:cNvPr id="4" name="TextBox 3"/>
+          <p:cNvPr id="5" name="TextBox 4"/>
           <p:cNvSpPr txBox="1"/>
           <p:nvPr/>
         </p:nvSpPr>
         <p:spPr>
           <a:xfrm>
-            <a:off x="914400" y="1463040"/>
-            <a:ext cx="10058400" cy="4754880"/>
+            <a:off x="822960" y="1188720"/>
+            <a:ext cx="10241280" cy="5120640"/>
           </a:xfrm>
           <a:prstGeom prst="rect">
             <a:avLst/>
@@ -5169,13 +4485,13 @@
           <a:p>
             <a:pPr>
               <a:spcAft>
-                <a:spcPts val="800"/>
+                <a:spcPts val="600"/>
               </a:spcAft>
-              <a:defRPr sz="2200" b="0">
-                <a:solidFill>
-                  <a:srgbClr val="222222"/>
-                </a:solidFill>
-                <a:latin typeface="Calibri"/>
+              <a:defRPr sz="1900">
+                <a:solidFill>
+                  <a:srgbClr val="333333"/>
+                </a:solidFill>
+                <a:latin typeface="Inter"/>
               </a:defRPr>
             </a:pPr>
             <a:r>
@@ -5185,13 +4501,13 @@
           <a:p>
             <a:pPr>
               <a:spcAft>
-                <a:spcPts val="800"/>
+                <a:spcPts val="600"/>
               </a:spcAft>
-              <a:defRPr sz="2200" b="0">
-                <a:solidFill>
-                  <a:srgbClr val="222222"/>
-                </a:solidFill>
-                <a:latin typeface="Calibri"/>
+              <a:defRPr sz="1900">
+                <a:solidFill>
+                  <a:srgbClr val="333333"/>
+                </a:solidFill>
+                <a:latin typeface="Inter"/>
               </a:defRPr>
             </a:pPr>
             <a:r>
@@ -5201,13 +4517,13 @@
           <a:p>
             <a:pPr>
               <a:spcAft>
-                <a:spcPts val="800"/>
+                <a:spcPts val="600"/>
               </a:spcAft>
-              <a:defRPr sz="2200" b="0">
-                <a:solidFill>
-                  <a:srgbClr val="222222"/>
-                </a:solidFill>
-                <a:latin typeface="Calibri"/>
+              <a:defRPr sz="1900">
+                <a:solidFill>
+                  <a:srgbClr val="333333"/>
+                </a:solidFill>
+                <a:latin typeface="Inter"/>
               </a:defRPr>
             </a:pPr>
             <a:r>
@@ -5217,29 +4533,29 @@
           <a:p>
             <a:pPr>
               <a:spcAft>
-                <a:spcPts val="800"/>
+                <a:spcPts val="600"/>
               </a:spcAft>
-              <a:defRPr sz="2200" b="0">
-                <a:solidFill>
-                  <a:srgbClr val="222222"/>
-                </a:solidFill>
-                <a:latin typeface="Calibri"/>
-              </a:defRPr>
-            </a:pPr>
-            <a:r>
-              <a:t>In practice, many experiments start with 6-20 factors</a:t>
+              <a:defRPr sz="1900">
+                <a:solidFill>
+                  <a:srgbClr val="333333"/>
+                </a:solidFill>
+                <a:latin typeface="Inter"/>
+              </a:defRPr>
+            </a:pPr>
+            <a:r>
+              <a:t>In practice, experiments often start with 6–20 factors</a:t>
             </a:r>
           </a:p>
           <a:p>
             <a:pPr>
               <a:spcAft>
-                <a:spcPts val="800"/>
+                <a:spcPts val="600"/>
               </a:spcAft>
-              <a:defRPr sz="2200" b="0">
-                <a:solidFill>
-                  <a:srgbClr val="222222"/>
-                </a:solidFill>
-                <a:latin typeface="Calibri"/>
+              <a:defRPr sz="1900">
+                <a:solidFill>
+                  <a:srgbClr val="333333"/>
+                </a:solidFill>
+                <a:latin typeface="Inter"/>
               </a:defRPr>
             </a:pPr>
             <a:r>
@@ -5249,17 +4565,53 @@
           <a:p>
             <a:pPr>
               <a:spcAft>
-                <a:spcPts val="800"/>
+                <a:spcPts val="600"/>
               </a:spcAft>
-              <a:defRPr sz="2200" b="0">
-                <a:solidFill>
-                  <a:srgbClr val="222222"/>
-                </a:solidFill>
-                <a:latin typeface="Calibri"/>
+              <a:defRPr sz="1900">
+                <a:solidFill>
+                  <a:srgbClr val="333333"/>
+                </a:solidFill>
+                <a:latin typeface="Inter"/>
               </a:defRPr>
             </a:pPr>
             <a:r>
               <a:t>Solution: run a fraction of the full factorial</a:t>
+            </a:r>
+          </a:p>
+        </p:txBody>
+      </p:sp>
+      <p:sp>
+        <p:nvSpPr>
+          <p:cNvPr id="6" name="TextBox 5"/>
+          <p:cNvSpPr txBox="1"/>
+          <p:nvPr/>
+        </p:nvSpPr>
+        <p:spPr>
+          <a:xfrm>
+            <a:off x="731520" y="6400800"/>
+            <a:ext cx="10058400" cy="365760"/>
+          </a:xfrm>
+          <a:prstGeom prst="rect">
+            <a:avLst/>
+          </a:prstGeom>
+          <a:noFill/>
+        </p:spPr>
+        <p:txBody>
+          <a:bodyPr wrap="square">
+            <a:spAutoFit/>
+          </a:bodyPr>
+          <a:lstStyle/>
+          <a:p>
+            <a:pPr algn="l">
+              <a:defRPr sz="1000" b="0">
+                <a:solidFill>
+                  <a:srgbClr val="999999"/>
+                </a:solidFill>
+                <a:latin typeface="Consolas"/>
+              </a:defRPr>
+            </a:pPr>
+            <a:r>
+              <a:t>© 2026 Martin J. Gallagher  |  GPL-3.0-or-later  |  doehelper.com</a:t>
             </a:r>
           </a:p>
         </p:txBody>
@@ -5278,7 +4630,7 @@
     <p:bg>
       <p:bgPr>
         <a:solidFill>
-          <a:srgbClr val="FFFFFF"/>
+          <a:srgbClr val="FAFAFA"/>
         </a:solidFill>
         <a:effectLst/>
       </p:bgPr>
@@ -5299,13 +4651,13 @@
         <p:spPr>
           <a:xfrm>
             <a:off x="0" y="0"/>
-            <a:ext cx="12191695" cy="54864"/>
+            <a:ext cx="12191695" cy="45720"/>
           </a:xfrm>
           <a:prstGeom prst="rect">
             <a:avLst/>
           </a:prstGeom>
           <a:solidFill>
-            <a:srgbClr val="007BFF"/>
+            <a:srgbClr val="5046E5"/>
           </a:solidFill>
           <a:ln>
             <a:noFill/>
@@ -5335,14 +4687,57 @@
       </p:sp>
       <p:sp>
         <p:nvSpPr>
-          <p:cNvPr id="3" name="TextBox 2"/>
+          <p:cNvPr id="3" name="Rectangle 2"/>
+          <p:cNvSpPr/>
+          <p:nvPr/>
+        </p:nvSpPr>
+        <p:spPr>
+          <a:xfrm>
+            <a:off x="548640" y="411480"/>
+            <a:ext cx="36576" cy="502920"/>
+          </a:xfrm>
+          <a:prstGeom prst="rect">
+            <a:avLst/>
+          </a:prstGeom>
+          <a:solidFill>
+            <a:srgbClr val="5046E5"/>
+          </a:solidFill>
+          <a:ln>
+            <a:noFill/>
+          </a:ln>
+        </p:spPr>
+        <p:style>
+          <a:lnRef idx="1">
+            <a:schemeClr val="accent1"/>
+          </a:lnRef>
+          <a:fillRef idx="3">
+            <a:schemeClr val="accent1"/>
+          </a:fillRef>
+          <a:effectRef idx="2">
+            <a:schemeClr val="accent1"/>
+          </a:effectRef>
+          <a:fontRef idx="minor">
+            <a:schemeClr val="lt1"/>
+          </a:fontRef>
+        </p:style>
+        <p:txBody>
+          <a:bodyPr rtlCol="0" anchor="ctr"/>
+          <a:lstStyle/>
+          <a:p>
+            <a:pPr algn="ctr"/>
+          </a:p>
+        </p:txBody>
+      </p:sp>
+      <p:sp>
+        <p:nvSpPr>
+          <p:cNvPr id="4" name="TextBox 3"/>
           <p:cNvSpPr txBox="1"/>
           <p:nvPr/>
         </p:nvSpPr>
         <p:spPr>
           <a:xfrm>
-            <a:off x="731520" y="365760"/>
-            <a:ext cx="10515600" cy="822960"/>
+            <a:off x="777240" y="365760"/>
+            <a:ext cx="10058400" cy="640080"/>
           </a:xfrm>
           <a:prstGeom prst="rect">
             <a:avLst/>
@@ -5355,12 +4750,12 @@
           </a:bodyPr>
           <a:lstStyle/>
           <a:p>
-            <a:pPr>
-              <a:defRPr sz="3200" b="1">
-                <a:solidFill>
-                  <a:srgbClr val="222222"/>
-                </a:solidFill>
-                <a:latin typeface="Calibri"/>
+            <a:pPr algn="l">
+              <a:defRPr sz="2800" b="1">
+                <a:solidFill>
+                  <a:srgbClr val="111111"/>
+                </a:solidFill>
+                <a:latin typeface="Inter"/>
               </a:defRPr>
             </a:pPr>
             <a:r>
@@ -5371,14 +4766,14 @@
       </p:sp>
       <p:sp>
         <p:nvSpPr>
-          <p:cNvPr id="4" name="TextBox 3"/>
+          <p:cNvPr id="5" name="TextBox 4"/>
           <p:cNvSpPr txBox="1"/>
           <p:nvPr/>
         </p:nvSpPr>
         <p:spPr>
           <a:xfrm>
-            <a:off x="914400" y="1463040"/>
-            <a:ext cx="10058400" cy="4754880"/>
+            <a:off x="822960" y="1188720"/>
+            <a:ext cx="10241280" cy="5120640"/>
           </a:xfrm>
           <a:prstGeom prst="rect">
             <a:avLst/>
@@ -5393,129 +4788,165 @@
           <a:p>
             <a:pPr>
               <a:spcAft>
-                <a:spcPts val="800"/>
+                <a:spcPts val="600"/>
               </a:spcAft>
-              <a:defRPr sz="2200" b="0">
-                <a:solidFill>
-                  <a:srgbClr val="222222"/>
-                </a:solidFill>
-                <a:latin typeface="Calibri"/>
-              </a:defRPr>
-            </a:pPr>
-            <a:r>
-              <a:t>Run 2^(k-p) instead of 2^k runs</a:t>
+              <a:defRPr sz="1900">
+                <a:solidFill>
+                  <a:srgbClr val="333333"/>
+                </a:solidFill>
+                <a:latin typeface="Inter"/>
+              </a:defRPr>
+            </a:pPr>
+            <a:r>
+              <a:t>Run 2ᵏ⁻ᵖ instead of 2ᵏ runs</a:t>
             </a:r>
           </a:p>
           <a:p>
             <a:pPr lvl="1">
               <a:spcAft>
-                <a:spcPts val="800"/>
+                <a:spcPts val="600"/>
+              </a:spcAft>
+              <a:defRPr sz="1700">
+                <a:solidFill>
+                  <a:srgbClr val="666666"/>
+                </a:solidFill>
+                <a:latin typeface="Inter"/>
+              </a:defRPr>
+            </a:pPr>
+            <a:r>
+              <a:t>2⁷⁻⁴ = 8 runs instead of 128 for 7 factors</a:t>
+            </a:r>
+          </a:p>
+          <a:p>
+            <a:pPr lvl="1">
+              <a:spcAft>
+                <a:spcPts val="600"/>
+              </a:spcAft>
+              <a:defRPr sz="1700">
+                <a:solidFill>
+                  <a:srgbClr val="666666"/>
+                </a:solidFill>
+                <a:latin typeface="Inter"/>
+              </a:defRPr>
+            </a:pPr>
+            <a:r>
+              <a:t>2⁶⁻² = 16 runs instead of 64 for 6 factors</a:t>
+            </a:r>
+          </a:p>
+          <a:p>
+            <a:pPr>
+              <a:spcAft>
+                <a:spcPts val="600"/>
               </a:spcAft>
               <a:defRPr sz="1900">
                 <a:solidFill>
-                  <a:srgbClr val="222222"/>
-                </a:solidFill>
-                <a:latin typeface="Calibri"/>
-              </a:defRPr>
-            </a:pPr>
-            <a:r>
-              <a:t>2^(7-4) = 8 runs instead of 128 for 7 factors</a:t>
+                  <a:srgbClr val="333333"/>
+                </a:solidFill>
+                <a:latin typeface="Inter"/>
+              </a:defRPr>
+            </a:pPr>
+            <a:r>
+              <a:t>Trade-off: some effects become aliased (confounded)</a:t>
+            </a:r>
+          </a:p>
+          <a:p>
+            <a:pPr>
+              <a:spcAft>
+                <a:spcPts val="600"/>
+              </a:spcAft>
+              <a:defRPr sz="1900">
+                <a:solidFill>
+                  <a:srgbClr val="333333"/>
+                </a:solidFill>
+                <a:latin typeface="Inter"/>
+              </a:defRPr>
+            </a:pPr>
+            <a:r>
+              <a:t>Resolution tells you what is confounded:</a:t>
             </a:r>
           </a:p>
           <a:p>
             <a:pPr lvl="1">
               <a:spcAft>
-                <a:spcPts val="800"/>
+                <a:spcPts val="600"/>
               </a:spcAft>
-              <a:defRPr sz="1900">
-                <a:solidFill>
-                  <a:srgbClr val="222222"/>
-                </a:solidFill>
-                <a:latin typeface="Calibri"/>
-              </a:defRPr>
-            </a:pPr>
-            <a:r>
-              <a:t>2^(6-2) = 16 runs instead of 64 for 6 factors</a:t>
-            </a:r>
-          </a:p>
-          <a:p>
-            <a:pPr>
-              <a:spcAft>
-                <a:spcPts val="800"/>
-              </a:spcAft>
-              <a:defRPr sz="2200" b="0">
-                <a:solidFill>
-                  <a:srgbClr val="222222"/>
-                </a:solidFill>
-                <a:latin typeface="Calibri"/>
-              </a:defRPr>
-            </a:pPr>
-            <a:r>
-              <a:t>Trade-off: some effects become aliased (confounded)</a:t>
-            </a:r>
-          </a:p>
-          <a:p>
-            <a:pPr>
-              <a:spcAft>
-                <a:spcPts val="800"/>
-              </a:spcAft>
-              <a:defRPr sz="2200" b="0">
-                <a:solidFill>
-                  <a:srgbClr val="222222"/>
-                </a:solidFill>
-                <a:latin typeface="Calibri"/>
-              </a:defRPr>
-            </a:pPr>
-            <a:r>
-              <a:t>Resolution tells you what is confounded with what:</a:t>
+              <a:defRPr sz="1700">
+                <a:solidFill>
+                  <a:srgbClr val="666666"/>
+                </a:solidFill>
+                <a:latin typeface="Inter"/>
+              </a:defRPr>
+            </a:pPr>
+            <a:r>
+              <a:t>Res III: main effects aliased with 2-factor interactions</a:t>
             </a:r>
           </a:p>
           <a:p>
             <a:pPr lvl="1">
               <a:spcAft>
-                <a:spcPts val="800"/>
+                <a:spcPts val="600"/>
               </a:spcAft>
-              <a:defRPr sz="1900">
-                <a:solidFill>
-                  <a:srgbClr val="222222"/>
-                </a:solidFill>
-                <a:latin typeface="Calibri"/>
-              </a:defRPr>
-            </a:pPr>
-            <a:r>
-              <a:t>Resolution III: main effects aliased with 2-factor interactions</a:t>
+              <a:defRPr sz="1700">
+                <a:solidFill>
+                  <a:srgbClr val="666666"/>
+                </a:solidFill>
+                <a:latin typeface="Inter"/>
+              </a:defRPr>
+            </a:pPr>
+            <a:r>
+              <a:t>Res IV: main effects clear, 2FI aliased with each other</a:t>
             </a:r>
           </a:p>
           <a:p>
             <a:pPr lvl="1">
               <a:spcAft>
-                <a:spcPts val="800"/>
+                <a:spcPts val="600"/>
               </a:spcAft>
-              <a:defRPr sz="1900">
-                <a:solidFill>
-                  <a:srgbClr val="222222"/>
-                </a:solidFill>
-                <a:latin typeface="Calibri"/>
-              </a:defRPr>
-            </a:pPr>
-            <a:r>
-              <a:t>Resolution IV: main effects clear, 2FI aliased with each other</a:t>
-            </a:r>
-          </a:p>
-          <a:p>
-            <a:pPr lvl="1">
-              <a:spcAft>
-                <a:spcPts val="800"/>
-              </a:spcAft>
-              <a:defRPr sz="1900">
-                <a:solidFill>
-                  <a:srgbClr val="222222"/>
-                </a:solidFill>
-                <a:latin typeface="Calibri"/>
-              </a:defRPr>
-            </a:pPr>
-            <a:r>
-              <a:t>Resolution V: main effects and 2FI all clear</a:t>
+              <a:defRPr sz="1700">
+                <a:solidFill>
+                  <a:srgbClr val="666666"/>
+                </a:solidFill>
+                <a:latin typeface="Inter"/>
+              </a:defRPr>
+            </a:pPr>
+            <a:r>
+              <a:t>Res V: main effects and 2FI all clear</a:t>
+            </a:r>
+          </a:p>
+        </p:txBody>
+      </p:sp>
+      <p:sp>
+        <p:nvSpPr>
+          <p:cNvPr id="6" name="TextBox 5"/>
+          <p:cNvSpPr txBox="1"/>
+          <p:nvPr/>
+        </p:nvSpPr>
+        <p:spPr>
+          <a:xfrm>
+            <a:off x="731520" y="6400800"/>
+            <a:ext cx="10058400" cy="365760"/>
+          </a:xfrm>
+          <a:prstGeom prst="rect">
+            <a:avLst/>
+          </a:prstGeom>
+          <a:noFill/>
+        </p:spPr>
+        <p:txBody>
+          <a:bodyPr wrap="square">
+            <a:spAutoFit/>
+          </a:bodyPr>
+          <a:lstStyle/>
+          <a:p>
+            <a:pPr algn="l">
+              <a:defRPr sz="1000" b="0">
+                <a:solidFill>
+                  <a:srgbClr val="999999"/>
+                </a:solidFill>
+                <a:latin typeface="Consolas"/>
+              </a:defRPr>
+            </a:pPr>
+            <a:r>
+              <a:t>© 2026 Martin J. Gallagher  |  GPL-3.0-or-later  |  doehelper.com</a:t>
             </a:r>
           </a:p>
         </p:txBody>
@@ -5534,7 +4965,7 @@
     <p:bg>
       <p:bgPr>
         <a:solidFill>
-          <a:srgbClr val="FFFFFF"/>
+          <a:srgbClr val="FAFAFA"/>
         </a:solidFill>
         <a:effectLst/>
       </p:bgPr>
@@ -5555,13 +4986,13 @@
         <p:spPr>
           <a:xfrm>
             <a:off x="0" y="0"/>
-            <a:ext cx="12191695" cy="54864"/>
+            <a:ext cx="12191695" cy="45720"/>
           </a:xfrm>
           <a:prstGeom prst="rect">
             <a:avLst/>
           </a:prstGeom>
           <a:solidFill>
-            <a:srgbClr val="00C853"/>
+            <a:srgbClr val="0D9488"/>
           </a:solidFill>
           <a:ln>
             <a:noFill/>
@@ -5597,8 +5028,8 @@
         </p:nvSpPr>
         <p:spPr>
           <a:xfrm>
-            <a:off x="731520" y="365760"/>
-            <a:ext cx="10515600" cy="822960"/>
+            <a:off x="777240" y="320040"/>
+            <a:ext cx="10058400" cy="548640"/>
           </a:xfrm>
           <a:prstGeom prst="rect">
             <a:avLst/>
@@ -5611,12 +5042,12 @@
           </a:bodyPr>
           <a:lstStyle/>
           <a:p>
-            <a:pPr>
-              <a:defRPr sz="3000" b="1">
-                <a:solidFill>
-                  <a:srgbClr val="222222"/>
-                </a:solidFill>
-                <a:latin typeface="Calibri"/>
+            <a:pPr algn="l">
+              <a:defRPr sz="2600" b="1">
+                <a:solidFill>
+                  <a:srgbClr val="111111"/>
+                </a:solidFill>
+                <a:latin typeface="Inter"/>
               </a:defRPr>
             </a:pPr>
             <a:r>
@@ -5627,20 +5058,20 @@
       </p:sp>
       <p:sp>
         <p:nvSpPr>
-          <p:cNvPr id="4" name="Rounded Rectangle 3"/>
+          <p:cNvPr id="4" name="Rectangle 3"/>
           <p:cNvSpPr/>
           <p:nvPr/>
         </p:nvSpPr>
         <p:spPr>
           <a:xfrm>
-            <a:off x="731520" y="1371600"/>
-            <a:ext cx="10515600" cy="4114800"/>
-          </a:xfrm>
-          <a:prstGeom prst="roundRect">
+            <a:off x="548640" y="1051560"/>
+            <a:ext cx="10972800" cy="320040"/>
+          </a:xfrm>
+          <a:prstGeom prst="rect">
             <a:avLst/>
           </a:prstGeom>
           <a:solidFill>
-            <a:srgbClr val="2D2D2D"/>
+            <a:srgbClr val="222222"/>
           </a:solidFill>
           <a:ln>
             <a:noFill/>
@@ -5661,16 +5092,95 @@
           </a:fontRef>
         </p:style>
         <p:txBody>
-          <a:bodyPr rtlCol="0" anchor="ctr" wrap="square" lIns="274320" tIns="274320"/>
+          <a:bodyPr rtlCol="0" anchor="ctr"/>
+          <a:lstStyle/>
+          <a:p>
+            <a:pPr algn="ctr"/>
+          </a:p>
+        </p:txBody>
+      </p:sp>
+      <p:sp>
+        <p:nvSpPr>
+          <p:cNvPr id="5" name="TextBox 4"/>
+          <p:cNvSpPr txBox="1"/>
+          <p:nvPr/>
+        </p:nvSpPr>
+        <p:spPr>
+          <a:xfrm>
+            <a:off x="822960" y="1051560"/>
+            <a:ext cx="3657600" cy="320040"/>
+          </a:xfrm>
+          <a:prstGeom prst="rect">
+            <a:avLst/>
+          </a:prstGeom>
+          <a:noFill/>
+        </p:spPr>
+        <p:txBody>
+          <a:bodyPr wrap="square" anchor="ctr">
+            <a:spAutoFit/>
+          </a:bodyPr>
+          <a:lstStyle/>
+          <a:p>
+            <a:pPr algn="l">
+              <a:defRPr sz="1000" b="0">
+                <a:solidFill>
+                  <a:srgbClr val="999999"/>
+                </a:solidFill>
+                <a:latin typeface="Consolas"/>
+              </a:defRPr>
+            </a:pPr>
+            <a:r>
+              <a:t>terminal</a:t>
+            </a:r>
+          </a:p>
+        </p:txBody>
+      </p:sp>
+      <p:sp>
+        <p:nvSpPr>
+          <p:cNvPr id="6" name="Rounded Rectangle 5"/>
+          <p:cNvSpPr/>
+          <p:nvPr/>
+        </p:nvSpPr>
+        <p:spPr>
+          <a:xfrm>
+            <a:off x="548640" y="1371600"/>
+            <a:ext cx="10972800" cy="4389120"/>
+          </a:xfrm>
+          <a:prstGeom prst="roundRect">
+            <a:avLst/>
+          </a:prstGeom>
+          <a:solidFill>
+            <a:srgbClr val="1A1A1A"/>
+          </a:solidFill>
+          <a:ln>
+            <a:noFill/>
+          </a:ln>
+        </p:spPr>
+        <p:style>
+          <a:lnRef idx="1">
+            <a:schemeClr val="accent1"/>
+          </a:lnRef>
+          <a:fillRef idx="3">
+            <a:schemeClr val="accent1"/>
+          </a:fillRef>
+          <a:effectRef idx="2">
+            <a:schemeClr val="accent1"/>
+          </a:effectRef>
+          <a:fontRef idx="minor">
+            <a:schemeClr val="lt1"/>
+          </a:fontRef>
+        </p:style>
+        <p:txBody>
+          <a:bodyPr rtlCol="0" anchor="ctr" wrap="square" lIns="274320" tIns="182880" rIns="274320"/>
           <a:lstStyle/>
           <a:p>
             <a:pPr algn="ctr">
               <a:spcAft>
-                <a:spcPts val="200"/>
+                <a:spcPts val="100"/>
               </a:spcAft>
-              <a:defRPr sz="1800">
-                <a:solidFill>
-                  <a:srgbClr val="D4D4D4"/>
+              <a:defRPr sz="1500">
+                <a:solidFill>
+                  <a:srgbClr val="CCCCCC"/>
                 </a:solidFill>
                 <a:latin typeface="Consolas"/>
               </a:defRPr>
@@ -5682,11 +5192,11 @@
           <a:p>
             <a:pPr>
               <a:spcAft>
-                <a:spcPts val="200"/>
+                <a:spcPts val="100"/>
               </a:spcAft>
-              <a:defRPr sz="1800">
-                <a:solidFill>
-                  <a:srgbClr val="D4D4D4"/>
+              <a:defRPr sz="1500">
+                <a:solidFill>
+                  <a:srgbClr val="CCCCCC"/>
                 </a:solidFill>
                 <a:latin typeface="Consolas"/>
               </a:defRPr>
@@ -5698,11 +5208,11 @@
           <a:p>
             <a:pPr>
               <a:spcAft>
-                <a:spcPts val="200"/>
+                <a:spcPts val="100"/>
               </a:spcAft>
-              <a:defRPr sz="1800">
-                <a:solidFill>
-                  <a:srgbClr val="D4D4D4"/>
+              <a:defRPr sz="1500">
+                <a:solidFill>
+                  <a:srgbClr val="CCCCCC"/>
                 </a:solidFill>
                 <a:latin typeface="Consolas"/>
               </a:defRPr>
@@ -5714,11 +5224,11 @@
           <a:p>
             <a:pPr>
               <a:spcAft>
-                <a:spcPts val="200"/>
+                <a:spcPts val="100"/>
               </a:spcAft>
-              <a:defRPr sz="1800">
-                <a:solidFill>
-                  <a:srgbClr val="D4D4D4"/>
+              <a:defRPr sz="1500">
+                <a:solidFill>
+                  <a:srgbClr val="CCCCCC"/>
                 </a:solidFill>
                 <a:latin typeface="Consolas"/>
               </a:defRPr>
@@ -5730,11 +5240,11 @@
           <a:p>
             <a:pPr>
               <a:spcAft>
-                <a:spcPts val="200"/>
+                <a:spcPts val="100"/>
               </a:spcAft>
-              <a:defRPr sz="1800">
-                <a:solidFill>
-                  <a:srgbClr val="D4D4D4"/>
+              <a:defRPr sz="1500">
+                <a:solidFill>
+                  <a:srgbClr val="CCCCCC"/>
                 </a:solidFill>
                 <a:latin typeface="Consolas"/>
               </a:defRPr>
@@ -5746,11 +5256,11 @@
           <a:p>
             <a:pPr>
               <a:spcAft>
-                <a:spcPts val="200"/>
+                <a:spcPts val="100"/>
               </a:spcAft>
-              <a:defRPr sz="1800">
-                <a:solidFill>
-                  <a:srgbClr val="D4D4D4"/>
+              <a:defRPr sz="1500">
+                <a:solidFill>
+                  <a:srgbClr val="CCCCCC"/>
                 </a:solidFill>
                 <a:latin typeface="Consolas"/>
               </a:defRPr>
@@ -5762,11 +5272,11 @@
           <a:p>
             <a:pPr>
               <a:spcAft>
-                <a:spcPts val="200"/>
+                <a:spcPts val="100"/>
               </a:spcAft>
-              <a:defRPr sz="1800">
-                <a:solidFill>
-                  <a:srgbClr val="D4D4D4"/>
+              <a:defRPr sz="1500">
+                <a:solidFill>
+                  <a:srgbClr val="CCCCCC"/>
                 </a:solidFill>
                 <a:latin typeface="Consolas"/>
               </a:defRPr>
@@ -5778,11 +5288,11 @@
           <a:p>
             <a:pPr>
               <a:spcAft>
-                <a:spcPts val="200"/>
+                <a:spcPts val="100"/>
               </a:spcAft>
-              <a:defRPr sz="1800">
-                <a:solidFill>
-                  <a:srgbClr val="D4D4D4"/>
+              <a:defRPr sz="1500">
+                <a:solidFill>
+                  <a:srgbClr val="CCCCCC"/>
                 </a:solidFill>
                 <a:latin typeface="Consolas"/>
               </a:defRPr>
@@ -5794,11 +5304,11 @@
           <a:p>
             <a:pPr>
               <a:spcAft>
-                <a:spcPts val="200"/>
+                <a:spcPts val="100"/>
               </a:spcAft>
-              <a:defRPr sz="1800">
-                <a:solidFill>
-                  <a:srgbClr val="D4D4D4"/>
+              <a:defRPr sz="1500">
+                <a:solidFill>
+                  <a:srgbClr val="CCCCCC"/>
                 </a:solidFill>
                 <a:latin typeface="Consolas"/>
               </a:defRPr>
@@ -5810,11 +5320,11 @@
           <a:p>
             <a:pPr>
               <a:spcAft>
-                <a:spcPts val="200"/>
+                <a:spcPts val="100"/>
               </a:spcAft>
-              <a:defRPr sz="1800">
-                <a:solidFill>
-                  <a:srgbClr val="D4D4D4"/>
+              <a:defRPr sz="1500">
+                <a:solidFill>
+                  <a:srgbClr val="CCCCCC"/>
                 </a:solidFill>
                 <a:latin typeface="Consolas"/>
               </a:defRPr>
@@ -5826,11 +5336,11 @@
           <a:p>
             <a:pPr>
               <a:spcAft>
-                <a:spcPts val="200"/>
+                <a:spcPts val="100"/>
               </a:spcAft>
-              <a:defRPr sz="1800">
-                <a:solidFill>
-                  <a:srgbClr val="D4D4D4"/>
+              <a:defRPr sz="1500">
+                <a:solidFill>
+                  <a:srgbClr val="CCCCCC"/>
                 </a:solidFill>
                 <a:latin typeface="Consolas"/>
               </a:defRPr>
@@ -5842,11 +5352,11 @@
           <a:p>
             <a:pPr>
               <a:spcAft>
-                <a:spcPts val="200"/>
+                <a:spcPts val="100"/>
               </a:spcAft>
-              <a:defRPr sz="1800">
-                <a:solidFill>
-                  <a:srgbClr val="D4D4D4"/>
+              <a:defRPr sz="1500">
+                <a:solidFill>
+                  <a:srgbClr val="CCCCCC"/>
                 </a:solidFill>
                 <a:latin typeface="Consolas"/>
               </a:defRPr>
@@ -5858,11 +5368,11 @@
           <a:p>
             <a:pPr>
               <a:spcAft>
-                <a:spcPts val="200"/>
+                <a:spcPts val="100"/>
               </a:spcAft>
-              <a:defRPr sz="1800">
-                <a:solidFill>
-                  <a:srgbClr val="D4D4D4"/>
+              <a:defRPr sz="1500">
+                <a:solidFill>
+                  <a:srgbClr val="CCCCCC"/>
                 </a:solidFill>
                 <a:latin typeface="Consolas"/>
               </a:defRPr>
@@ -5874,11 +5384,11 @@
           <a:p>
             <a:pPr>
               <a:spcAft>
-                <a:spcPts val="200"/>
+                <a:spcPts val="100"/>
               </a:spcAft>
-              <a:defRPr sz="1800">
-                <a:solidFill>
-                  <a:srgbClr val="D4D4D4"/>
+              <a:defRPr sz="1500">
+                <a:solidFill>
+                  <a:srgbClr val="CCCCCC"/>
                 </a:solidFill>
                 <a:latin typeface="Consolas"/>
               </a:defRPr>
@@ -5890,11 +5400,11 @@
           <a:p>
             <a:pPr>
               <a:spcAft>
-                <a:spcPts val="200"/>
+                <a:spcPts val="100"/>
               </a:spcAft>
-              <a:defRPr sz="1800">
-                <a:solidFill>
-                  <a:srgbClr val="D4D4D4"/>
+              <a:defRPr sz="1500">
+                <a:solidFill>
+                  <a:srgbClr val="CCCCCC"/>
                 </a:solidFill>
                 <a:latin typeface="Consolas"/>
               </a:defRPr>
@@ -5906,11 +5416,11 @@
           <a:p>
             <a:pPr>
               <a:spcAft>
-                <a:spcPts val="200"/>
+                <a:spcPts val="100"/>
               </a:spcAft>
-              <a:defRPr sz="1800">
-                <a:solidFill>
-                  <a:srgbClr val="D4D4D4"/>
+              <a:defRPr sz="1500">
+                <a:solidFill>
+                  <a:srgbClr val="CCCCCC"/>
                 </a:solidFill>
                 <a:latin typeface="Consolas"/>
               </a:defRPr>
@@ -5919,49 +5429,69 @@
           <a:p>
             <a:pPr>
               <a:spcAft>
-                <a:spcPts val="200"/>
+                <a:spcPts val="100"/>
               </a:spcAft>
-              <a:defRPr sz="1800">
-                <a:solidFill>
-                  <a:srgbClr val="D4D4D4"/>
+              <a:defRPr sz="1500">
+                <a:solidFill>
+                  <a:srgbClr val="6EC86E"/>
                 </a:solidFill>
                 <a:latin typeface="Consolas"/>
               </a:defRPr>
             </a:pPr>
             <a:r>
-              <a:t># doe-helper automatically selects the appropriate resolution</a:t>
+              <a:t>$ doe generate screening/</a:t>
             </a:r>
           </a:p>
           <a:p>
             <a:pPr>
               <a:spcAft>
-                <a:spcPts val="200"/>
+                <a:spcPts val="100"/>
               </a:spcAft>
-              <a:defRPr sz="1800">
-                <a:solidFill>
-                  <a:srgbClr val="D4D4D4"/>
+              <a:defRPr sz="1500">
+                <a:solidFill>
+                  <a:srgbClr val="6EC86E"/>
                 </a:solidFill>
                 <a:latin typeface="Consolas"/>
               </a:defRPr>
             </a:pPr>
             <a:r>
-              <a:t>$ doe generate screening_exp/</a:t>
-            </a:r>
-          </a:p>
-          <a:p>
-            <a:pPr>
-              <a:spcAft>
-                <a:spcPts val="200"/>
-              </a:spcAft>
-              <a:defRPr sz="1800">
-                <a:solidFill>
-                  <a:srgbClr val="D4D4D4"/>
+              <a:t>$ doe info screening/       # shows aliasing structure</a:t>
+            </a:r>
+          </a:p>
+        </p:txBody>
+      </p:sp>
+      <p:sp>
+        <p:nvSpPr>
+          <p:cNvPr id="7" name="TextBox 6"/>
+          <p:cNvSpPr txBox="1"/>
+          <p:nvPr/>
+        </p:nvSpPr>
+        <p:spPr>
+          <a:xfrm>
+            <a:off x="731520" y="6400800"/>
+            <a:ext cx="10058400" cy="365760"/>
+          </a:xfrm>
+          <a:prstGeom prst="rect">
+            <a:avLst/>
+          </a:prstGeom>
+          <a:noFill/>
+        </p:spPr>
+        <p:txBody>
+          <a:bodyPr wrap="square">
+            <a:spAutoFit/>
+          </a:bodyPr>
+          <a:lstStyle/>
+          <a:p>
+            <a:pPr algn="l">
+              <a:defRPr sz="1000" b="0">
+                <a:solidFill>
+                  <a:srgbClr val="999999"/>
                 </a:solidFill>
                 <a:latin typeface="Consolas"/>
               </a:defRPr>
             </a:pPr>
             <a:r>
-              <a:t>$ doe info screening_exp/  # shows aliasing structure</a:t>
+              <a:t>© 2026 Martin J. Gallagher  |  GPL-3.0-or-later  |  doehelper.com</a:t>
             </a:r>
           </a:p>
         </p:txBody>
@@ -5980,7 +5510,7 @@
     <p:bg>
       <p:bgPr>
         <a:solidFill>
-          <a:srgbClr val="FFFFFF"/>
+          <a:srgbClr val="FAFAFA"/>
         </a:solidFill>
         <a:effectLst/>
       </p:bgPr>
@@ -6001,13 +5531,13 @@
         <p:spPr>
           <a:xfrm>
             <a:off x="0" y="0"/>
-            <a:ext cx="12191695" cy="54864"/>
+            <a:ext cx="12191695" cy="45720"/>
           </a:xfrm>
           <a:prstGeom prst="rect">
             <a:avLst/>
           </a:prstGeom>
           <a:solidFill>
-            <a:srgbClr val="007BFF"/>
+            <a:srgbClr val="5046E5"/>
           </a:solidFill>
           <a:ln>
             <a:noFill/>
@@ -6037,14 +5567,57 @@
       </p:sp>
       <p:sp>
         <p:nvSpPr>
-          <p:cNvPr id="3" name="TextBox 2"/>
+          <p:cNvPr id="3" name="Rectangle 2"/>
+          <p:cNvSpPr/>
+          <p:nvPr/>
+        </p:nvSpPr>
+        <p:spPr>
+          <a:xfrm>
+            <a:off x="548640" y="411480"/>
+            <a:ext cx="36576" cy="502920"/>
+          </a:xfrm>
+          <a:prstGeom prst="rect">
+            <a:avLst/>
+          </a:prstGeom>
+          <a:solidFill>
+            <a:srgbClr val="5046E5"/>
+          </a:solidFill>
+          <a:ln>
+            <a:noFill/>
+          </a:ln>
+        </p:spPr>
+        <p:style>
+          <a:lnRef idx="1">
+            <a:schemeClr val="accent1"/>
+          </a:lnRef>
+          <a:fillRef idx="3">
+            <a:schemeClr val="accent1"/>
+          </a:fillRef>
+          <a:effectRef idx="2">
+            <a:schemeClr val="accent1"/>
+          </a:effectRef>
+          <a:fontRef idx="minor">
+            <a:schemeClr val="lt1"/>
+          </a:fontRef>
+        </p:style>
+        <p:txBody>
+          <a:bodyPr rtlCol="0" anchor="ctr"/>
+          <a:lstStyle/>
+          <a:p>
+            <a:pPr algn="ctr"/>
+          </a:p>
+        </p:txBody>
+      </p:sp>
+      <p:sp>
+        <p:nvSpPr>
+          <p:cNvPr id="4" name="TextBox 3"/>
           <p:cNvSpPr txBox="1"/>
           <p:nvPr/>
         </p:nvSpPr>
         <p:spPr>
           <a:xfrm>
-            <a:off x="731520" y="365760"/>
-            <a:ext cx="10515600" cy="822960"/>
+            <a:off x="777240" y="365760"/>
+            <a:ext cx="10058400" cy="640080"/>
           </a:xfrm>
           <a:prstGeom prst="rect">
             <a:avLst/>
@@ -6057,30 +5630,116 @@
           </a:bodyPr>
           <a:lstStyle/>
           <a:p>
-            <a:pPr>
-              <a:defRPr sz="3200" b="1">
-                <a:solidFill>
-                  <a:srgbClr val="222222"/>
-                </a:solidFill>
-                <a:latin typeface="Calibri"/>
-              </a:defRPr>
-            </a:pPr>
-            <a:r>
-              <a:t>Plackett-Burman Designs</a:t>
-            </a:r>
-          </a:p>
-        </p:txBody>
-      </p:sp>
-      <p:sp>
-        <p:nvSpPr>
-          <p:cNvPr id="4" name="TextBox 3"/>
+            <a:pPr algn="l">
+              <a:defRPr sz="2800" b="1">
+                <a:solidFill>
+                  <a:srgbClr val="111111"/>
+                </a:solidFill>
+                <a:latin typeface="Inter"/>
+              </a:defRPr>
+            </a:pPr>
+            <a:r>
+              <a:t>Plackett-Burman vs. Definitive Screening</a:t>
+            </a:r>
+          </a:p>
+        </p:txBody>
+      </p:sp>
+      <p:sp>
+        <p:nvSpPr>
+          <p:cNvPr id="5" name="Rounded Rectangle 4"/>
+          <p:cNvSpPr/>
+          <p:nvPr/>
+        </p:nvSpPr>
+        <p:spPr>
+          <a:xfrm>
+            <a:off x="548640" y="1188720"/>
+            <a:ext cx="5303520" cy="4937760"/>
+          </a:xfrm>
+          <a:prstGeom prst="roundRect">
+            <a:avLst/>
+          </a:prstGeom>
+          <a:solidFill>
+            <a:srgbClr val="F0FDF4"/>
+          </a:solidFill>
+          <a:ln>
+            <a:noFill/>
+          </a:ln>
+        </p:spPr>
+        <p:style>
+          <a:lnRef idx="1">
+            <a:schemeClr val="accent1"/>
+          </a:lnRef>
+          <a:fillRef idx="3">
+            <a:schemeClr val="accent1"/>
+          </a:fillRef>
+          <a:effectRef idx="2">
+            <a:schemeClr val="accent1"/>
+          </a:effectRef>
+          <a:fontRef idx="minor">
+            <a:schemeClr val="lt1"/>
+          </a:fontRef>
+        </p:style>
+        <p:txBody>
+          <a:bodyPr rtlCol="0" anchor="ctr"/>
+          <a:lstStyle/>
+          <a:p>
+            <a:pPr algn="ctr"/>
+          </a:p>
+        </p:txBody>
+      </p:sp>
+      <p:sp>
+        <p:nvSpPr>
+          <p:cNvPr id="6" name="Rectangle 5"/>
+          <p:cNvSpPr/>
+          <p:nvPr/>
+        </p:nvSpPr>
+        <p:spPr>
+          <a:xfrm>
+            <a:off x="548640" y="1188720"/>
+            <a:ext cx="36576" cy="4937760"/>
+          </a:xfrm>
+          <a:prstGeom prst="rect">
+            <a:avLst/>
+          </a:prstGeom>
+          <a:solidFill>
+            <a:srgbClr val="16A34A"/>
+          </a:solidFill>
+          <a:ln>
+            <a:noFill/>
+          </a:ln>
+        </p:spPr>
+        <p:style>
+          <a:lnRef idx="1">
+            <a:schemeClr val="accent1"/>
+          </a:lnRef>
+          <a:fillRef idx="3">
+            <a:schemeClr val="accent1"/>
+          </a:fillRef>
+          <a:effectRef idx="2">
+            <a:schemeClr val="accent1"/>
+          </a:effectRef>
+          <a:fontRef idx="minor">
+            <a:schemeClr val="lt1"/>
+          </a:fontRef>
+        </p:style>
+        <p:txBody>
+          <a:bodyPr rtlCol="0" anchor="ctr"/>
+          <a:lstStyle/>
+          <a:p>
+            <a:pPr algn="ctr"/>
+          </a:p>
+        </p:txBody>
+      </p:sp>
+      <p:sp>
+        <p:nvSpPr>
+          <p:cNvPr id="7" name="TextBox 6"/>
           <p:cNvSpPr txBox="1"/>
           <p:nvPr/>
         </p:nvSpPr>
         <p:spPr>
           <a:xfrm>
-            <a:off x="914400" y="1463040"/>
-            <a:ext cx="10058400" cy="4754880"/>
+            <a:off x="822960" y="1325880"/>
+            <a:ext cx="4754880" cy="365760"/>
           </a:xfrm>
           <a:prstGeom prst="rect">
             <a:avLst/>
@@ -6093,131 +5752,444 @@
           </a:bodyPr>
           <a:lstStyle/>
           <a:p>
+            <a:pPr algn="l">
+              <a:defRPr sz="1600" b="1">
+                <a:solidFill>
+                  <a:srgbClr val="16A34A"/>
+                </a:solidFill>
+                <a:latin typeface="Consolas"/>
+              </a:defRPr>
+            </a:pPr>
+            <a:r>
+              <a:t>PLACKETT-BURMAN</a:t>
+            </a:r>
+          </a:p>
+        </p:txBody>
+      </p:sp>
+      <p:sp>
+        <p:nvSpPr>
+          <p:cNvPr id="8" name="TextBox 7"/>
+          <p:cNvSpPr txBox="1"/>
+          <p:nvPr/>
+        </p:nvSpPr>
+        <p:spPr>
+          <a:xfrm>
+            <a:off x="822960" y="1737360"/>
+            <a:ext cx="4754880" cy="4114800"/>
+          </a:xfrm>
+          <a:prstGeom prst="rect">
+            <a:avLst/>
+          </a:prstGeom>
+          <a:noFill/>
+        </p:spPr>
+        <p:txBody>
+          <a:bodyPr wrap="square">
+            <a:spAutoFit/>
+          </a:bodyPr>
+          <a:lstStyle/>
+          <a:p>
             <a:pPr>
               <a:spcAft>
-                <a:spcPts val="800"/>
+                <a:spcPts val="500"/>
               </a:spcAft>
-              <a:defRPr sz="2200" b="0">
-                <a:solidFill>
-                  <a:srgbClr val="222222"/>
-                </a:solidFill>
-                <a:latin typeface="Calibri"/>
-              </a:defRPr>
-            </a:pPr>
-            <a:r>
-              <a:t>Resolution III screening designs</a:t>
+              <a:defRPr sz="1700">
+                <a:solidFill>
+                  <a:srgbClr val="333333"/>
+                </a:solidFill>
+                <a:latin typeface="Inter"/>
+              </a:defRPr>
+            </a:pPr>
+            <a:r>
+              <a:t>Plackett-Burman (PB)</a:t>
             </a:r>
           </a:p>
           <a:p>
             <a:pPr>
               <a:spcAft>
-                <a:spcPts val="800"/>
+                <a:spcPts val="500"/>
               </a:spcAft>
-              <a:defRPr sz="2200" b="0">
-                <a:solidFill>
-                  <a:srgbClr val="222222"/>
-                </a:solidFill>
-                <a:latin typeface="Calibri"/>
-              </a:defRPr>
-            </a:pPr>
-            <a:r>
-              <a:t>Run counts in multiples of 4: 12, 20, 24, 28, 36...</a:t>
+              <a:defRPr sz="1700">
+                <a:solidFill>
+                  <a:srgbClr val="333333"/>
+                </a:solidFill>
+                <a:latin typeface="Inter"/>
+              </a:defRPr>
+            </a:pPr>
+            <a:r>
+              <a:t>Run counts: multiples of 4 (12, 20, 24…)</a:t>
             </a:r>
           </a:p>
           <a:p>
             <a:pPr>
               <a:spcAft>
-                <a:spcPts val="800"/>
+                <a:spcPts val="500"/>
               </a:spcAft>
-              <a:defRPr sz="2200" b="0">
-                <a:solidFill>
-                  <a:srgbClr val="222222"/>
-                </a:solidFill>
-                <a:latin typeface="Calibri"/>
-              </a:defRPr>
-            </a:pPr>
-            <a:r>
-              <a:t>Screen up to N-1 factors in N runs</a:t>
-            </a:r>
-          </a:p>
-          <a:p>
-            <a:pPr lvl="1">
-              <a:spcAft>
-                <a:spcPts val="800"/>
-              </a:spcAft>
-              <a:defRPr sz="1900">
-                <a:solidFill>
-                  <a:srgbClr val="222222"/>
-                </a:solidFill>
-                <a:latin typeface="Calibri"/>
-              </a:defRPr>
-            </a:pPr>
-            <a:r>
-              <a:t>12 runs -&gt; up to 11 factors</a:t>
-            </a:r>
-          </a:p>
-          <a:p>
-            <a:pPr lvl="1">
-              <a:spcAft>
-                <a:spcPts val="800"/>
-              </a:spcAft>
-              <a:defRPr sz="1900">
-                <a:solidFill>
-                  <a:srgbClr val="222222"/>
-                </a:solidFill>
-                <a:latin typeface="Calibri"/>
-              </a:defRPr>
-            </a:pPr>
-            <a:r>
-              <a:t>20 runs -&gt; up to 19 factors</a:t>
+              <a:defRPr sz="1700">
+                <a:solidFill>
+                  <a:srgbClr val="333333"/>
+                </a:solidFill>
+                <a:latin typeface="Inter"/>
+              </a:defRPr>
+            </a:pPr>
+            <a:r>
+              <a:t>Screen up to N−1 factors in N runs</a:t>
             </a:r>
           </a:p>
           <a:p>
             <a:pPr>
               <a:spcAft>
-                <a:spcPts val="800"/>
+                <a:spcPts val="500"/>
               </a:spcAft>
-              <a:defRPr sz="2200" b="0">
-                <a:solidFill>
-                  <a:srgbClr val="222222"/>
-                </a:solidFill>
-                <a:latin typeface="Calibri"/>
-              </a:defRPr>
-            </a:pPr>
-            <a:r>
-              <a:t>Very efficient for identifying the vital few factors</a:t>
+              <a:defRPr sz="1700">
+                <a:solidFill>
+                  <a:srgbClr val="333333"/>
+                </a:solidFill>
+                <a:latin typeface="Inter"/>
+              </a:defRPr>
+            </a:pPr>
+            <a:r>
+              <a:t>Resolution III</a:t>
             </a:r>
           </a:p>
           <a:p>
             <a:pPr>
               <a:spcAft>
-                <a:spcPts val="800"/>
+                <a:spcPts val="500"/>
               </a:spcAft>
-              <a:defRPr sz="2200" b="0">
-                <a:solidFill>
-                  <a:srgbClr val="222222"/>
-                </a:solidFill>
-                <a:latin typeface="Calibri"/>
-              </a:defRPr>
-            </a:pPr>
-            <a:r>
-              <a:t>Main effects are confounded with 2-factor interactions</a:t>
+              <a:defRPr sz="1700">
+                <a:solidFill>
+                  <a:srgbClr val="333333"/>
+                </a:solidFill>
+                <a:latin typeface="Inter"/>
+              </a:defRPr>
+            </a:pPr>
+            <a:r>
+              <a:t>Main effects aliased with 2FIs</a:t>
             </a:r>
           </a:p>
           <a:p>
             <a:pPr>
               <a:spcAft>
-                <a:spcPts val="800"/>
+                <a:spcPts val="500"/>
               </a:spcAft>
-              <a:defRPr sz="2200" b="0">
-                <a:solidFill>
-                  <a:srgbClr val="222222"/>
-                </a:solidFill>
-                <a:latin typeface="Calibri"/>
-              </a:defRPr>
-            </a:pPr>
-            <a:r>
-              <a:t>Use: initial screening when you have many candidate factors</a:t>
+              <a:defRPr sz="1700">
+                <a:solidFill>
+                  <a:srgbClr val="333333"/>
+                </a:solidFill>
+                <a:latin typeface="Inter"/>
+              </a:defRPr>
+            </a:pPr>
+            <a:r>
+              <a:t>No curvature detection</a:t>
+            </a:r>
+          </a:p>
+          <a:p>
+            <a:pPr>
+              <a:spcAft>
+                <a:spcPts val="500"/>
+              </a:spcAft>
+              <a:defRPr sz="1700">
+                <a:solidFill>
+                  <a:srgbClr val="333333"/>
+                </a:solidFill>
+                <a:latin typeface="Inter"/>
+              </a:defRPr>
+            </a:pPr>
+            <a:r>
+              <a:t>Best for: initial rough screening</a:t>
+            </a:r>
+          </a:p>
+        </p:txBody>
+      </p:sp>
+      <p:sp>
+        <p:nvSpPr>
+          <p:cNvPr id="9" name="Rounded Rectangle 8"/>
+          <p:cNvSpPr/>
+          <p:nvPr/>
+        </p:nvSpPr>
+        <p:spPr>
+          <a:xfrm>
+            <a:off x="6217920" y="1188720"/>
+            <a:ext cx="5303520" cy="4937760"/>
+          </a:xfrm>
+          <a:prstGeom prst="roundRect">
+            <a:avLst/>
+          </a:prstGeom>
+          <a:solidFill>
+            <a:srgbClr val="EEF2FF"/>
+          </a:solidFill>
+          <a:ln>
+            <a:noFill/>
+          </a:ln>
+        </p:spPr>
+        <p:style>
+          <a:lnRef idx="1">
+            <a:schemeClr val="accent1"/>
+          </a:lnRef>
+          <a:fillRef idx="3">
+            <a:schemeClr val="accent1"/>
+          </a:fillRef>
+          <a:effectRef idx="2">
+            <a:schemeClr val="accent1"/>
+          </a:effectRef>
+          <a:fontRef idx="minor">
+            <a:schemeClr val="lt1"/>
+          </a:fontRef>
+        </p:style>
+        <p:txBody>
+          <a:bodyPr rtlCol="0" anchor="ctr"/>
+          <a:lstStyle/>
+          <a:p>
+            <a:pPr algn="ctr"/>
+          </a:p>
+        </p:txBody>
+      </p:sp>
+      <p:sp>
+        <p:nvSpPr>
+          <p:cNvPr id="10" name="Rectangle 9"/>
+          <p:cNvSpPr/>
+          <p:nvPr/>
+        </p:nvSpPr>
+        <p:spPr>
+          <a:xfrm>
+            <a:off x="6217920" y="1188720"/>
+            <a:ext cx="36576" cy="4937760"/>
+          </a:xfrm>
+          <a:prstGeom prst="rect">
+            <a:avLst/>
+          </a:prstGeom>
+          <a:solidFill>
+            <a:srgbClr val="5046E5"/>
+          </a:solidFill>
+          <a:ln>
+            <a:noFill/>
+          </a:ln>
+        </p:spPr>
+        <p:style>
+          <a:lnRef idx="1">
+            <a:schemeClr val="accent1"/>
+          </a:lnRef>
+          <a:fillRef idx="3">
+            <a:schemeClr val="accent1"/>
+          </a:fillRef>
+          <a:effectRef idx="2">
+            <a:schemeClr val="accent1"/>
+          </a:effectRef>
+          <a:fontRef idx="minor">
+            <a:schemeClr val="lt1"/>
+          </a:fontRef>
+        </p:style>
+        <p:txBody>
+          <a:bodyPr rtlCol="0" anchor="ctr"/>
+          <a:lstStyle/>
+          <a:p>
+            <a:pPr algn="ctr"/>
+          </a:p>
+        </p:txBody>
+      </p:sp>
+      <p:sp>
+        <p:nvSpPr>
+          <p:cNvPr id="11" name="TextBox 10"/>
+          <p:cNvSpPr txBox="1"/>
+          <p:nvPr/>
+        </p:nvSpPr>
+        <p:spPr>
+          <a:xfrm>
+            <a:off x="6492240" y="1325880"/>
+            <a:ext cx="4754880" cy="365760"/>
+          </a:xfrm>
+          <a:prstGeom prst="rect">
+            <a:avLst/>
+          </a:prstGeom>
+          <a:noFill/>
+        </p:spPr>
+        <p:txBody>
+          <a:bodyPr wrap="square">
+            <a:spAutoFit/>
+          </a:bodyPr>
+          <a:lstStyle/>
+          <a:p>
+            <a:pPr algn="l">
+              <a:defRPr sz="1600" b="1">
+                <a:solidFill>
+                  <a:srgbClr val="5046E5"/>
+                </a:solidFill>
+                <a:latin typeface="Consolas"/>
+              </a:defRPr>
+            </a:pPr>
+            <a:r>
+              <a:t>DEFINITIVE SCREENING</a:t>
+            </a:r>
+          </a:p>
+        </p:txBody>
+      </p:sp>
+      <p:sp>
+        <p:nvSpPr>
+          <p:cNvPr id="12" name="TextBox 11"/>
+          <p:cNvSpPr txBox="1"/>
+          <p:nvPr/>
+        </p:nvSpPr>
+        <p:spPr>
+          <a:xfrm>
+            <a:off x="6492240" y="1737360"/>
+            <a:ext cx="4754880" cy="4114800"/>
+          </a:xfrm>
+          <a:prstGeom prst="rect">
+            <a:avLst/>
+          </a:prstGeom>
+          <a:noFill/>
+        </p:spPr>
+        <p:txBody>
+          <a:bodyPr wrap="square">
+            <a:spAutoFit/>
+          </a:bodyPr>
+          <a:lstStyle/>
+          <a:p>
+            <a:pPr>
+              <a:spcAft>
+                <a:spcPts val="500"/>
+              </a:spcAft>
+              <a:defRPr sz="1700">
+                <a:solidFill>
+                  <a:srgbClr val="333333"/>
+                </a:solidFill>
+                <a:latin typeface="Inter"/>
+              </a:defRPr>
+            </a:pPr>
+            <a:r>
+              <a:t>Definitive Screening (DSD)</a:t>
+            </a:r>
+          </a:p>
+          <a:p>
+            <a:pPr>
+              <a:spcAft>
+                <a:spcPts val="500"/>
+              </a:spcAft>
+              <a:defRPr sz="1700">
+                <a:solidFill>
+                  <a:srgbClr val="333333"/>
+                </a:solidFill>
+                <a:latin typeface="Inter"/>
+              </a:defRPr>
+            </a:pPr>
+            <a:r>
+              <a:t>2k+1 runs for k factors</a:t>
+            </a:r>
+          </a:p>
+          <a:p>
+            <a:pPr>
+              <a:spcAft>
+                <a:spcPts val="500"/>
+              </a:spcAft>
+              <a:defRPr sz="1700">
+                <a:solidFill>
+                  <a:srgbClr val="333333"/>
+                </a:solidFill>
+                <a:latin typeface="Inter"/>
+              </a:defRPr>
+            </a:pPr>
+            <a:r>
+              <a:t>Three-level design (low/mid/high)</a:t>
+            </a:r>
+          </a:p>
+          <a:p>
+            <a:pPr>
+              <a:spcAft>
+                <a:spcPts val="500"/>
+              </a:spcAft>
+              <a:defRPr sz="1700">
+                <a:solidFill>
+                  <a:srgbClr val="333333"/>
+                </a:solidFill>
+                <a:latin typeface="Inter"/>
+              </a:defRPr>
+            </a:pPr>
+            <a:r>
+              <a:t>Main effects NOT aliased with 2FIs</a:t>
+            </a:r>
+          </a:p>
+          <a:p>
+            <a:pPr>
+              <a:spcAft>
+                <a:spcPts val="500"/>
+              </a:spcAft>
+              <a:defRPr sz="1700">
+                <a:solidFill>
+                  <a:srgbClr val="333333"/>
+                </a:solidFill>
+                <a:latin typeface="Inter"/>
+              </a:defRPr>
+            </a:pPr>
+            <a:r>
+              <a:t>Can detect curvature</a:t>
+            </a:r>
+          </a:p>
+          <a:p>
+            <a:pPr>
+              <a:spcAft>
+                <a:spcPts val="500"/>
+              </a:spcAft>
+              <a:defRPr sz="1700">
+                <a:solidFill>
+                  <a:srgbClr val="333333"/>
+                </a:solidFill>
+                <a:latin typeface="Inter"/>
+              </a:defRPr>
+            </a:pPr>
+            <a:r>
+              <a:t>Modern best practice (Jones 2011)</a:t>
+            </a:r>
+          </a:p>
+          <a:p>
+            <a:pPr>
+              <a:spcAft>
+                <a:spcPts val="500"/>
+              </a:spcAft>
+              <a:defRPr sz="1700">
+                <a:solidFill>
+                  <a:srgbClr val="333333"/>
+                </a:solidFill>
+                <a:latin typeface="Inter"/>
+              </a:defRPr>
+            </a:pPr>
+            <a:r>
+              <a:t>Best for: cleaner screening</a:t>
+            </a:r>
+          </a:p>
+        </p:txBody>
+      </p:sp>
+      <p:sp>
+        <p:nvSpPr>
+          <p:cNvPr id="13" name="TextBox 12"/>
+          <p:cNvSpPr txBox="1"/>
+          <p:nvPr/>
+        </p:nvSpPr>
+        <p:spPr>
+          <a:xfrm>
+            <a:off x="731520" y="6400800"/>
+            <a:ext cx="10058400" cy="365760"/>
+          </a:xfrm>
+          <a:prstGeom prst="rect">
+            <a:avLst/>
+          </a:prstGeom>
+          <a:noFill/>
+        </p:spPr>
+        <p:txBody>
+          <a:bodyPr wrap="square">
+            <a:spAutoFit/>
+          </a:bodyPr>
+          <a:lstStyle/>
+          <a:p>
+            <a:pPr algn="l">
+              <a:defRPr sz="1000" b="0">
+                <a:solidFill>
+                  <a:srgbClr val="999999"/>
+                </a:solidFill>
+                <a:latin typeface="Consolas"/>
+              </a:defRPr>
+            </a:pPr>
+            <a:r>
+              <a:t>© 2026 Martin J. Gallagher  |  GPL-3.0-or-later  |  doehelper.com</a:t>
             </a:r>
           </a:p>
         </p:txBody>
@@ -6236,7 +6208,7 @@
     <p:bg>
       <p:bgPr>
         <a:solidFill>
-          <a:srgbClr val="FFFFFF"/>
+          <a:srgbClr val="FAFAFA"/>
         </a:solidFill>
         <a:effectLst/>
       </p:bgPr>
@@ -6257,13 +6229,13 @@
         <p:spPr>
           <a:xfrm>
             <a:off x="0" y="0"/>
-            <a:ext cx="12191695" cy="54864"/>
+            <a:ext cx="12191695" cy="45720"/>
           </a:xfrm>
           <a:prstGeom prst="rect">
             <a:avLst/>
           </a:prstGeom>
           <a:solidFill>
-            <a:srgbClr val="00C853"/>
+            <a:srgbClr val="5046E5"/>
           </a:solidFill>
           <a:ln>
             <a:noFill/>
@@ -6293,56 +6265,20 @@
       </p:sp>
       <p:sp>
         <p:nvSpPr>
-          <p:cNvPr id="3" name="TextBox 2"/>
-          <p:cNvSpPr txBox="1"/>
-          <p:nvPr/>
-        </p:nvSpPr>
-        <p:spPr>
-          <a:xfrm>
-            <a:off x="731520" y="365760"/>
-            <a:ext cx="10515600" cy="822960"/>
-          </a:xfrm>
-          <a:prstGeom prst="rect">
-            <a:avLst/>
-          </a:prstGeom>
-          <a:noFill/>
-        </p:spPr>
-        <p:txBody>
-          <a:bodyPr wrap="square">
-            <a:spAutoFit/>
-          </a:bodyPr>
-          <a:lstStyle/>
-          <a:p>
-            <a:pPr>
-              <a:defRPr sz="3000" b="1">
-                <a:solidFill>
-                  <a:srgbClr val="222222"/>
-                </a:solidFill>
-                <a:latin typeface="Calibri"/>
-              </a:defRPr>
-            </a:pPr>
-            <a:r>
-              <a:t>Plackett-Burman with doe-helper</a:t>
-            </a:r>
-          </a:p>
-        </p:txBody>
-      </p:sp>
-      <p:sp>
-        <p:nvSpPr>
-          <p:cNvPr id="4" name="Rounded Rectangle 3"/>
+          <p:cNvPr id="3" name="Rectangle 2"/>
           <p:cNvSpPr/>
           <p:nvPr/>
         </p:nvSpPr>
         <p:spPr>
           <a:xfrm>
-            <a:off x="731520" y="1371600"/>
-            <a:ext cx="10515600" cy="4114800"/>
-          </a:xfrm>
-          <a:prstGeom prst="roundRect">
+            <a:off x="548640" y="411480"/>
+            <a:ext cx="36576" cy="502920"/>
+          </a:xfrm>
+          <a:prstGeom prst="rect">
             <a:avLst/>
           </a:prstGeom>
           <a:solidFill>
-            <a:srgbClr val="2D2D2D"/>
+            <a:srgbClr val="5046E5"/>
           </a:solidFill>
           <a:ln>
             <a:noFill/>
@@ -6363,291 +6299,248 @@
           </a:fontRef>
         </p:style>
         <p:txBody>
-          <a:bodyPr rtlCol="0" anchor="ctr" wrap="square" lIns="274320" tIns="274320"/>
-          <a:lstStyle/>
-          <a:p>
-            <a:pPr algn="ctr">
-              <a:spcAft>
-                <a:spcPts val="200"/>
-              </a:spcAft>
-              <a:defRPr sz="1800">
-                <a:solidFill>
-                  <a:srgbClr val="D4D4D4"/>
-                </a:solidFill>
-                <a:latin typeface="Consolas"/>
-              </a:defRPr>
-            </a:pPr>
-            <a:r>
-              <a:t>{</a:t>
-            </a:r>
-          </a:p>
+          <a:bodyPr rtlCol="0" anchor="ctr"/>
+          <a:lstStyle/>
+          <a:p>
+            <a:pPr algn="ctr"/>
+          </a:p>
+        </p:txBody>
+      </p:sp>
+      <p:sp>
+        <p:nvSpPr>
+          <p:cNvPr id="4" name="TextBox 3"/>
+          <p:cNvSpPr txBox="1"/>
+          <p:nvPr/>
+        </p:nvSpPr>
+        <p:spPr>
+          <a:xfrm>
+            <a:off x="777240" y="365760"/>
+            <a:ext cx="10058400" cy="640080"/>
+          </a:xfrm>
+          <a:prstGeom prst="rect">
+            <a:avLst/>
+          </a:prstGeom>
+          <a:noFill/>
+        </p:spPr>
+        <p:txBody>
+          <a:bodyPr wrap="square">
+            <a:spAutoFit/>
+          </a:bodyPr>
+          <a:lstStyle/>
+          <a:p>
+            <a:pPr algn="l">
+              <a:defRPr sz="2800" b="1">
+                <a:solidFill>
+                  <a:srgbClr val="111111"/>
+                </a:solidFill>
+                <a:latin typeface="Inter"/>
+              </a:defRPr>
+            </a:pPr>
+            <a:r>
+              <a:t>The Screening Workflow</a:t>
+            </a:r>
+          </a:p>
+        </p:txBody>
+      </p:sp>
+      <p:sp>
+        <p:nvSpPr>
+          <p:cNvPr id="5" name="TextBox 4"/>
+          <p:cNvSpPr txBox="1"/>
+          <p:nvPr/>
+        </p:nvSpPr>
+        <p:spPr>
+          <a:xfrm>
+            <a:off x="822960" y="1188720"/>
+            <a:ext cx="10241280" cy="5120640"/>
+          </a:xfrm>
+          <a:prstGeom prst="rect">
+            <a:avLst/>
+          </a:prstGeom>
+          <a:noFill/>
+        </p:spPr>
+        <p:txBody>
+          <a:bodyPr wrap="square">
+            <a:spAutoFit/>
+          </a:bodyPr>
+          <a:lstStyle/>
           <a:p>
             <a:pPr>
               <a:spcAft>
-                <a:spcPts val="200"/>
+                <a:spcPts val="600"/>
               </a:spcAft>
-              <a:defRPr sz="1800">
-                <a:solidFill>
-                  <a:srgbClr val="D4D4D4"/>
-                </a:solidFill>
-                <a:latin typeface="Consolas"/>
-              </a:defRPr>
-            </a:pPr>
-            <a:r>
-              <a:t>  "factors": {</a:t>
+              <a:defRPr sz="1900">
+                <a:solidFill>
+                  <a:srgbClr val="333333"/>
+                </a:solidFill>
+                <a:latin typeface="Inter"/>
+              </a:defRPr>
+            </a:pPr>
+            <a:r>
+              <a:t>Phase 1: Screen</a:t>
+            </a:r>
+          </a:p>
+          <a:p>
+            <a:pPr lvl="1">
+              <a:spcAft>
+                <a:spcPts val="600"/>
+              </a:spcAft>
+              <a:defRPr sz="1700">
+                <a:solidFill>
+                  <a:srgbClr val="666666"/>
+                </a:solidFill>
+                <a:latin typeface="Inter"/>
+              </a:defRPr>
+            </a:pPr>
+            <a:r>
+              <a:t>Run PB or DSD with all candidate factors</a:t>
+            </a:r>
+          </a:p>
+          <a:p>
+            <a:pPr lvl="1">
+              <a:spcAft>
+                <a:spcPts val="600"/>
+              </a:spcAft>
+              <a:defRPr sz="1700">
+                <a:solidFill>
+                  <a:srgbClr val="666666"/>
+                </a:solidFill>
+                <a:latin typeface="Inter"/>
+              </a:defRPr>
+            </a:pPr>
+            <a:r>
+              <a:t>Identify 3–5 significant factors, drop the rest</a:t>
             </a:r>
           </a:p>
           <a:p>
             <a:pPr>
               <a:spcAft>
-                <a:spcPts val="200"/>
+                <a:spcPts val="600"/>
               </a:spcAft>
-              <a:defRPr sz="1800">
-                <a:solidFill>
-                  <a:srgbClr val="D4D4D4"/>
-                </a:solidFill>
-                <a:latin typeface="Consolas"/>
-              </a:defRPr>
-            </a:pPr>
-            <a:r>
-              <a:t>    "cache_ttl":      {"low": 60,   "high": 3600,  "units": "sec"},</a:t>
+              <a:defRPr sz="1900">
+                <a:solidFill>
+                  <a:srgbClr val="333333"/>
+                </a:solidFill>
+                <a:latin typeface="Inter"/>
+              </a:defRPr>
+            </a:pPr>
+            <a:r>
+              <a:t>Phase 2: Characterise</a:t>
+            </a:r>
+          </a:p>
+          <a:p>
+            <a:pPr lvl="1">
+              <a:spcAft>
+                <a:spcPts val="600"/>
+              </a:spcAft>
+              <a:defRPr sz="1700">
+                <a:solidFill>
+                  <a:srgbClr val="666666"/>
+                </a:solidFill>
+                <a:latin typeface="Inter"/>
+              </a:defRPr>
+            </a:pPr>
+            <a:r>
+              <a:t>Full factorial on surviving factors</a:t>
+            </a:r>
+          </a:p>
+          <a:p>
+            <a:pPr lvl="1">
+              <a:spcAft>
+                <a:spcPts val="600"/>
+              </a:spcAft>
+              <a:defRPr sz="1700">
+                <a:solidFill>
+                  <a:srgbClr val="666666"/>
+                </a:solidFill>
+                <a:latin typeface="Inter"/>
+              </a:defRPr>
+            </a:pPr>
+            <a:r>
+              <a:t>Estimate all interactions, check for curvature</a:t>
             </a:r>
           </a:p>
           <a:p>
             <a:pPr>
               <a:spcAft>
-                <a:spcPts val="200"/>
+                <a:spcPts val="600"/>
               </a:spcAft>
-              <a:defRPr sz="1800">
-                <a:solidFill>
-                  <a:srgbClr val="D4D4D4"/>
+              <a:defRPr sz="1900">
+                <a:solidFill>
+                  <a:srgbClr val="333333"/>
+                </a:solidFill>
+                <a:latin typeface="Inter"/>
+              </a:defRPr>
+            </a:pPr>
+            <a:r>
+              <a:t>Phase 3: Optimise</a:t>
+            </a:r>
+          </a:p>
+          <a:p>
+            <a:pPr lvl="1">
+              <a:spcAft>
+                <a:spcPts val="600"/>
+              </a:spcAft>
+              <a:defRPr sz="1700">
+                <a:solidFill>
+                  <a:srgbClr val="666666"/>
+                </a:solidFill>
+                <a:latin typeface="Inter"/>
+              </a:defRPr>
+            </a:pPr>
+            <a:r>
+              <a:t>Response surface design (CCD, Box-Behnken)</a:t>
+            </a:r>
+          </a:p>
+          <a:p>
+            <a:pPr lvl="1">
+              <a:spcAft>
+                <a:spcPts val="600"/>
+              </a:spcAft>
+              <a:defRPr sz="1700">
+                <a:solidFill>
+                  <a:srgbClr val="666666"/>
+                </a:solidFill>
+                <a:latin typeface="Inter"/>
+              </a:defRPr>
+            </a:pPr>
+            <a:r>
+              <a:t>doe optimize for final settings</a:t>
+            </a:r>
+          </a:p>
+        </p:txBody>
+      </p:sp>
+      <p:sp>
+        <p:nvSpPr>
+          <p:cNvPr id="6" name="TextBox 5"/>
+          <p:cNvSpPr txBox="1"/>
+          <p:nvPr/>
+        </p:nvSpPr>
+        <p:spPr>
+          <a:xfrm>
+            <a:off x="731520" y="6400800"/>
+            <a:ext cx="10058400" cy="365760"/>
+          </a:xfrm>
+          <a:prstGeom prst="rect">
+            <a:avLst/>
+          </a:prstGeom>
+          <a:noFill/>
+        </p:spPr>
+        <p:txBody>
+          <a:bodyPr wrap="square">
+            <a:spAutoFit/>
+          </a:bodyPr>
+          <a:lstStyle/>
+          <a:p>
+            <a:pPr algn="l">
+              <a:defRPr sz="1000" b="0">
+                <a:solidFill>
+                  <a:srgbClr val="999999"/>
                 </a:solidFill>
                 <a:latin typeface="Consolas"/>
               </a:defRPr>
             </a:pPr>
             <a:r>
-              <a:t>    "max_connections": {"low": 10,   "high": 100},</a:t>
-            </a:r>
-          </a:p>
-          <a:p>
-            <a:pPr>
-              <a:spcAft>
-                <a:spcPts val="200"/>
-              </a:spcAft>
-              <a:defRPr sz="1800">
-                <a:solidFill>
-                  <a:srgbClr val="D4D4D4"/>
-                </a:solidFill>
-                <a:latin typeface="Consolas"/>
-              </a:defRPr>
-            </a:pPr>
-            <a:r>
-              <a:t>    "thread_pool":    {"low": 4,    "high": 64},</a:t>
-            </a:r>
-          </a:p>
-          <a:p>
-            <a:pPr>
-              <a:spcAft>
-                <a:spcPts val="200"/>
-              </a:spcAft>
-              <a:defRPr sz="1800">
-                <a:solidFill>
-                  <a:srgbClr val="D4D4D4"/>
-                </a:solidFill>
-                <a:latin typeface="Consolas"/>
-              </a:defRPr>
-            </a:pPr>
-            <a:r>
-              <a:t>    "buffer_size":    {"low": 1024, "high": 65536, "units": "bytes"},</a:t>
-            </a:r>
-          </a:p>
-          <a:p>
-            <a:pPr>
-              <a:spcAft>
-                <a:spcPts val="200"/>
-              </a:spcAft>
-              <a:defRPr sz="1800">
-                <a:solidFill>
-                  <a:srgbClr val="D4D4D4"/>
-                </a:solidFill>
-                <a:latin typeface="Consolas"/>
-              </a:defRPr>
-            </a:pPr>
-            <a:r>
-              <a:t>    "retry_count":    {"low": 0,    "high": 5},</a:t>
-            </a:r>
-          </a:p>
-          <a:p>
-            <a:pPr>
-              <a:spcAft>
-                <a:spcPts val="200"/>
-              </a:spcAft>
-              <a:defRPr sz="1800">
-                <a:solidFill>
-                  <a:srgbClr val="D4D4D4"/>
-                </a:solidFill>
-                <a:latin typeface="Consolas"/>
-              </a:defRPr>
-            </a:pPr>
-            <a:r>
-              <a:t>    "timeout":        {"low": 1,    "high": 30,    "units": "sec"},</a:t>
-            </a:r>
-          </a:p>
-          <a:p>
-            <a:pPr>
-              <a:spcAft>
-                <a:spcPts val="200"/>
-              </a:spcAft>
-              <a:defRPr sz="1800">
-                <a:solidFill>
-                  <a:srgbClr val="D4D4D4"/>
-                </a:solidFill>
-                <a:latin typeface="Consolas"/>
-              </a:defRPr>
-            </a:pPr>
-            <a:r>
-              <a:t>    "batch_size":     {"low": 10,   "high": 1000}</a:t>
-            </a:r>
-          </a:p>
-          <a:p>
-            <a:pPr>
-              <a:spcAft>
-                <a:spcPts val="200"/>
-              </a:spcAft>
-              <a:defRPr sz="1800">
-                <a:solidFill>
-                  <a:srgbClr val="D4D4D4"/>
-                </a:solidFill>
-                <a:latin typeface="Consolas"/>
-              </a:defRPr>
-            </a:pPr>
-            <a:r>
-              <a:t>  },</a:t>
-            </a:r>
-          </a:p>
-          <a:p>
-            <a:pPr>
-              <a:spcAft>
-                <a:spcPts val="200"/>
-              </a:spcAft>
-              <a:defRPr sz="1800">
-                <a:solidFill>
-                  <a:srgbClr val="D4D4D4"/>
-                </a:solidFill>
-                <a:latin typeface="Consolas"/>
-              </a:defRPr>
-            </a:pPr>
-            <a:r>
-              <a:t>  "responses": {</a:t>
-            </a:r>
-          </a:p>
-          <a:p>
-            <a:pPr>
-              <a:spcAft>
-                <a:spcPts val="200"/>
-              </a:spcAft>
-              <a:defRPr sz="1800">
-                <a:solidFill>
-                  <a:srgbClr val="D4D4D4"/>
-                </a:solidFill>
-                <a:latin typeface="Consolas"/>
-              </a:defRPr>
-            </a:pPr>
-            <a:r>
-              <a:t>    "latency_p99": {"units": "ms", "target": "minimize"}</a:t>
-            </a:r>
-          </a:p>
-          <a:p>
-            <a:pPr>
-              <a:spcAft>
-                <a:spcPts val="200"/>
-              </a:spcAft>
-              <a:defRPr sz="1800">
-                <a:solidFill>
-                  <a:srgbClr val="D4D4D4"/>
-                </a:solidFill>
-                <a:latin typeface="Consolas"/>
-              </a:defRPr>
-            </a:pPr>
-            <a:r>
-              <a:t>  },</a:t>
-            </a:r>
-          </a:p>
-          <a:p>
-            <a:pPr>
-              <a:spcAft>
-                <a:spcPts val="200"/>
-              </a:spcAft>
-              <a:defRPr sz="1800">
-                <a:solidFill>
-                  <a:srgbClr val="D4D4D4"/>
-                </a:solidFill>
-                <a:latin typeface="Consolas"/>
-              </a:defRPr>
-            </a:pPr>
-            <a:r>
-              <a:t>  "design": {"type": "plackett_burman"}</a:t>
-            </a:r>
-          </a:p>
-          <a:p>
-            <a:pPr>
-              <a:spcAft>
-                <a:spcPts val="200"/>
-              </a:spcAft>
-              <a:defRPr sz="1800">
-                <a:solidFill>
-                  <a:srgbClr val="D4D4D4"/>
-                </a:solidFill>
-                <a:latin typeface="Consolas"/>
-              </a:defRPr>
-            </a:pPr>
-            <a:r>
-              <a:t>}</a:t>
-            </a:r>
-          </a:p>
-          <a:p>
-            <a:pPr>
-              <a:spcAft>
-                <a:spcPts val="200"/>
-              </a:spcAft>
-              <a:defRPr sz="1800">
-                <a:solidFill>
-                  <a:srgbClr val="D4D4D4"/>
-                </a:solidFill>
-                <a:latin typeface="Consolas"/>
-              </a:defRPr>
-            </a:pPr>
-          </a:p>
-          <a:p>
-            <a:pPr>
-              <a:spcAft>
-                <a:spcPts val="200"/>
-              </a:spcAft>
-              <a:defRPr sz="1800">
-                <a:solidFill>
-                  <a:srgbClr val="D4D4D4"/>
-                </a:solidFill>
-                <a:latin typeface="Consolas"/>
-              </a:defRPr>
-            </a:pPr>
-            <a:r>
-              <a:t># Only 12 runs to screen 7 factors!</a:t>
-            </a:r>
-          </a:p>
-          <a:p>
-            <a:pPr>
-              <a:spcAft>
-                <a:spcPts val="200"/>
-              </a:spcAft>
-              <a:defRPr sz="1800">
-                <a:solidFill>
-                  <a:srgbClr val="D4D4D4"/>
-                </a:solidFill>
-                <a:latin typeface="Consolas"/>
-              </a:defRPr>
-            </a:pPr>
-            <a:r>
-              <a:t>$ doe generate api_screening/</a:t>
+              <a:t>© 2026 Martin J. Gallagher  |  GPL-3.0-or-later  |  doehelper.com</a:t>
             </a:r>
           </a:p>
         </p:txBody>
@@ -6666,7 +6559,7 @@
     <p:bg>
       <p:bgPr>
         <a:solidFill>
-          <a:srgbClr val="FFFFFF"/>
+          <a:srgbClr val="FAFAFA"/>
         </a:solidFill>
         <a:effectLst/>
       </p:bgPr>
@@ -6687,13 +6580,13 @@
         <p:spPr>
           <a:xfrm>
             <a:off x="0" y="0"/>
-            <a:ext cx="12191695" cy="54864"/>
+            <a:ext cx="12191695" cy="45720"/>
           </a:xfrm>
           <a:prstGeom prst="rect">
             <a:avLst/>
           </a:prstGeom>
           <a:solidFill>
-            <a:srgbClr val="007BFF"/>
+            <a:srgbClr val="0D9488"/>
           </a:solidFill>
           <a:ln>
             <a:noFill/>
@@ -6729,8 +6622,8 @@
         </p:nvSpPr>
         <p:spPr>
           <a:xfrm>
-            <a:off x="731520" y="365760"/>
-            <a:ext cx="10515600" cy="822960"/>
+            <a:off x="777240" y="320040"/>
+            <a:ext cx="10058400" cy="548640"/>
           </a:xfrm>
           <a:prstGeom prst="rect">
             <a:avLst/>
@@ -6743,30 +6636,287 @@
           </a:bodyPr>
           <a:lstStyle/>
           <a:p>
-            <a:pPr>
-              <a:defRPr sz="3200" b="1">
-                <a:solidFill>
-                  <a:srgbClr val="222222"/>
-                </a:solidFill>
-                <a:latin typeface="Calibri"/>
-              </a:defRPr>
-            </a:pPr>
-            <a:r>
-              <a:t>Definitive Screening Designs</a:t>
-            </a:r>
-          </a:p>
-        </p:txBody>
-      </p:sp>
-      <p:sp>
-        <p:nvSpPr>
-          <p:cNvPr id="4" name="TextBox 3"/>
+            <a:pPr algn="l">
+              <a:defRPr sz="2600" b="1">
+                <a:solidFill>
+                  <a:srgbClr val="111111"/>
+                </a:solidFill>
+                <a:latin typeface="Inter"/>
+              </a:defRPr>
+            </a:pPr>
+            <a:r>
+              <a:t>Fold-Over with doe augment</a:t>
+            </a:r>
+          </a:p>
+        </p:txBody>
+      </p:sp>
+      <p:sp>
+        <p:nvSpPr>
+          <p:cNvPr id="4" name="Rectangle 3"/>
+          <p:cNvSpPr/>
+          <p:nvPr/>
+        </p:nvSpPr>
+        <p:spPr>
+          <a:xfrm>
+            <a:off x="548640" y="1051560"/>
+            <a:ext cx="10972800" cy="320040"/>
+          </a:xfrm>
+          <a:prstGeom prst="rect">
+            <a:avLst/>
+          </a:prstGeom>
+          <a:solidFill>
+            <a:srgbClr val="222222"/>
+          </a:solidFill>
+          <a:ln>
+            <a:noFill/>
+          </a:ln>
+        </p:spPr>
+        <p:style>
+          <a:lnRef idx="1">
+            <a:schemeClr val="accent1"/>
+          </a:lnRef>
+          <a:fillRef idx="3">
+            <a:schemeClr val="accent1"/>
+          </a:fillRef>
+          <a:effectRef idx="2">
+            <a:schemeClr val="accent1"/>
+          </a:effectRef>
+          <a:fontRef idx="minor">
+            <a:schemeClr val="lt1"/>
+          </a:fontRef>
+        </p:style>
+        <p:txBody>
+          <a:bodyPr rtlCol="0" anchor="ctr"/>
+          <a:lstStyle/>
+          <a:p>
+            <a:pPr algn="ctr"/>
+          </a:p>
+        </p:txBody>
+      </p:sp>
+      <p:sp>
+        <p:nvSpPr>
+          <p:cNvPr id="5" name="TextBox 4"/>
           <p:cNvSpPr txBox="1"/>
           <p:nvPr/>
         </p:nvSpPr>
         <p:spPr>
           <a:xfrm>
-            <a:off x="914400" y="1463040"/>
-            <a:ext cx="10058400" cy="4754880"/>
+            <a:off x="822960" y="1051560"/>
+            <a:ext cx="3657600" cy="320040"/>
+          </a:xfrm>
+          <a:prstGeom prst="rect">
+            <a:avLst/>
+          </a:prstGeom>
+          <a:noFill/>
+        </p:spPr>
+        <p:txBody>
+          <a:bodyPr wrap="square" anchor="ctr">
+            <a:spAutoFit/>
+          </a:bodyPr>
+          <a:lstStyle/>
+          <a:p>
+            <a:pPr algn="l">
+              <a:defRPr sz="1000" b="0">
+                <a:solidFill>
+                  <a:srgbClr val="999999"/>
+                </a:solidFill>
+                <a:latin typeface="Consolas"/>
+              </a:defRPr>
+            </a:pPr>
+            <a:r>
+              <a:t>terminal</a:t>
+            </a:r>
+          </a:p>
+        </p:txBody>
+      </p:sp>
+      <p:sp>
+        <p:nvSpPr>
+          <p:cNvPr id="6" name="Rounded Rectangle 5"/>
+          <p:cNvSpPr/>
+          <p:nvPr/>
+        </p:nvSpPr>
+        <p:spPr>
+          <a:xfrm>
+            <a:off x="548640" y="1371600"/>
+            <a:ext cx="10972800" cy="3931920"/>
+          </a:xfrm>
+          <a:prstGeom prst="roundRect">
+            <a:avLst/>
+          </a:prstGeom>
+          <a:solidFill>
+            <a:srgbClr val="1A1A1A"/>
+          </a:solidFill>
+          <a:ln>
+            <a:noFill/>
+          </a:ln>
+        </p:spPr>
+        <p:style>
+          <a:lnRef idx="1">
+            <a:schemeClr val="accent1"/>
+          </a:lnRef>
+          <a:fillRef idx="3">
+            <a:schemeClr val="accent1"/>
+          </a:fillRef>
+          <a:effectRef idx="2">
+            <a:schemeClr val="accent1"/>
+          </a:effectRef>
+          <a:fontRef idx="minor">
+            <a:schemeClr val="lt1"/>
+          </a:fontRef>
+        </p:style>
+        <p:txBody>
+          <a:bodyPr rtlCol="0" anchor="ctr" wrap="square" lIns="274320" tIns="182880" rIns="274320"/>
+          <a:lstStyle/>
+          <a:p>
+            <a:pPr algn="ctr">
+              <a:spcAft>
+                <a:spcPts val="100"/>
+              </a:spcAft>
+              <a:defRPr sz="1500">
+                <a:solidFill>
+                  <a:srgbClr val="555555"/>
+                </a:solidFill>
+                <a:latin typeface="Consolas"/>
+              </a:defRPr>
+            </a:pPr>
+            <a:r>
+              <a:t># After screening, de-alias confounded effects:</a:t>
+            </a:r>
+          </a:p>
+          <a:p>
+            <a:pPr>
+              <a:spcAft>
+                <a:spcPts val="100"/>
+              </a:spcAft>
+              <a:defRPr sz="1500">
+                <a:solidFill>
+                  <a:srgbClr val="6EC86E"/>
+                </a:solidFill>
+                <a:latin typeface="Consolas"/>
+              </a:defRPr>
+            </a:pPr>
+            <a:r>
+              <a:t>$ doe augment api_screening/ --method fold-over</a:t>
+            </a:r>
+          </a:p>
+          <a:p>
+            <a:pPr>
+              <a:spcAft>
+                <a:spcPts val="100"/>
+              </a:spcAft>
+              <a:defRPr sz="1500">
+                <a:solidFill>
+                  <a:srgbClr val="CCCCCC"/>
+                </a:solidFill>
+                <a:latin typeface="Consolas"/>
+              </a:defRPr>
+            </a:pPr>
+          </a:p>
+          <a:p>
+            <a:pPr>
+              <a:spcAft>
+                <a:spcPts val="100"/>
+              </a:spcAft>
+              <a:defRPr sz="1500">
+                <a:solidFill>
+                  <a:srgbClr val="555555"/>
+                </a:solidFill>
+                <a:latin typeface="Consolas"/>
+              </a:defRPr>
+            </a:pPr>
+            <a:r>
+              <a:t># Mirrors the original design to break aliases</a:t>
+            </a:r>
+          </a:p>
+          <a:p>
+            <a:pPr>
+              <a:spcAft>
+                <a:spcPts val="100"/>
+              </a:spcAft>
+              <a:defRPr sz="1500">
+                <a:solidFill>
+                  <a:srgbClr val="555555"/>
+                </a:solidFill>
+                <a:latin typeface="Consolas"/>
+              </a:defRPr>
+            </a:pPr>
+            <a:r>
+              <a:t># Doubles run count but separates confounded effects</a:t>
+            </a:r>
+          </a:p>
+          <a:p>
+            <a:pPr>
+              <a:spcAft>
+                <a:spcPts val="100"/>
+              </a:spcAft>
+              <a:defRPr sz="1500">
+                <a:solidFill>
+                  <a:srgbClr val="CCCCCC"/>
+                </a:solidFill>
+                <a:latin typeface="Consolas"/>
+              </a:defRPr>
+            </a:pPr>
+          </a:p>
+          <a:p>
+            <a:pPr>
+              <a:spcAft>
+                <a:spcPts val="100"/>
+              </a:spcAft>
+              <a:defRPr sz="1500">
+                <a:solidFill>
+                  <a:srgbClr val="555555"/>
+                </a:solidFill>
+                <a:latin typeface="Consolas"/>
+              </a:defRPr>
+            </a:pPr>
+            <a:r>
+              <a:t># Other augmentation methods:</a:t>
+            </a:r>
+          </a:p>
+          <a:p>
+            <a:pPr>
+              <a:spcAft>
+                <a:spcPts val="100"/>
+              </a:spcAft>
+              <a:defRPr sz="1500">
+                <a:solidFill>
+                  <a:srgbClr val="6EC86E"/>
+                </a:solidFill>
+                <a:latin typeface="Consolas"/>
+              </a:defRPr>
+            </a:pPr>
+            <a:r>
+              <a:t>$ doe augment experiment/ --method center-points --count 5</a:t>
+            </a:r>
+          </a:p>
+          <a:p>
+            <a:pPr>
+              <a:spcAft>
+                <a:spcPts val="100"/>
+              </a:spcAft>
+              <a:defRPr sz="1500">
+                <a:solidFill>
+                  <a:srgbClr val="6EC86E"/>
+                </a:solidFill>
+                <a:latin typeface="Consolas"/>
+              </a:defRPr>
+            </a:pPr>
+            <a:r>
+              <a:t>$ doe augment experiment/ --method star-points</a:t>
+            </a:r>
+          </a:p>
+        </p:txBody>
+      </p:sp>
+      <p:sp>
+        <p:nvSpPr>
+          <p:cNvPr id="7" name="TextBox 6"/>
+          <p:cNvSpPr txBox="1"/>
+          <p:nvPr/>
+        </p:nvSpPr>
+        <p:spPr>
+          <a:xfrm>
+            <a:off x="822960" y="5349240"/>
+            <a:ext cx="10058400" cy="640080"/>
           </a:xfrm>
           <a:prstGeom prst="rect">
             <a:avLst/>
@@ -6779,131 +6929,52 @@
           </a:bodyPr>
           <a:lstStyle/>
           <a:p>
-            <a:pPr>
-              <a:spcAft>
-                <a:spcPts val="800"/>
-              </a:spcAft>
-              <a:defRPr sz="2200" b="0">
-                <a:solidFill>
-                  <a:srgbClr val="222222"/>
-                </a:solidFill>
-                <a:latin typeface="Calibri"/>
-              </a:defRPr>
-            </a:pPr>
-            <a:r>
-              <a:t>Modern alternative to Plackett-Burman (Jones &amp; Nachtsheim, 2011)</a:t>
-            </a:r>
-          </a:p>
-          <a:p>
-            <a:pPr>
-              <a:spcAft>
-                <a:spcPts val="800"/>
-              </a:spcAft>
-              <a:defRPr sz="2200" b="0">
-                <a:solidFill>
-                  <a:srgbClr val="222222"/>
-                </a:solidFill>
-                <a:latin typeface="Calibri"/>
-              </a:defRPr>
-            </a:pPr>
-            <a:r>
-              <a:t>Three-level designs: estimate some quadratic effects</a:t>
-            </a:r>
-          </a:p>
-          <a:p>
-            <a:pPr>
-              <a:spcAft>
-                <a:spcPts val="800"/>
-              </a:spcAft>
-              <a:defRPr sz="2200" b="0">
-                <a:solidFill>
-                  <a:srgbClr val="222222"/>
-                </a:solidFill>
-                <a:latin typeface="Calibri"/>
-              </a:defRPr>
-            </a:pPr>
-            <a:r>
-              <a:t>2k+1 runs for k continuous factors</a:t>
-            </a:r>
-          </a:p>
-          <a:p>
-            <a:pPr>
-              <a:spcAft>
-                <a:spcPts val="800"/>
-              </a:spcAft>
-              <a:defRPr sz="2200" b="0">
-                <a:solidFill>
-                  <a:srgbClr val="222222"/>
-                </a:solidFill>
-                <a:latin typeface="Calibri"/>
-              </a:defRPr>
-            </a:pPr>
-            <a:r>
-              <a:t>Advantages over Plackett-Burman:</a:t>
-            </a:r>
-          </a:p>
-          <a:p>
-            <a:pPr lvl="1">
-              <a:spcAft>
-                <a:spcPts val="800"/>
-              </a:spcAft>
-              <a:defRPr sz="1900">
-                <a:solidFill>
-                  <a:srgbClr val="222222"/>
-                </a:solidFill>
-                <a:latin typeface="Calibri"/>
-              </a:defRPr>
-            </a:pPr>
-            <a:r>
-              <a:t>Main effects not aliased with two-factor interactions</a:t>
-            </a:r>
-          </a:p>
-          <a:p>
-            <a:pPr lvl="1">
-              <a:spcAft>
-                <a:spcPts val="800"/>
-              </a:spcAft>
-              <a:defRPr sz="1900">
-                <a:solidFill>
-                  <a:srgbClr val="222222"/>
-                </a:solidFill>
-                <a:latin typeface="Calibri"/>
-              </a:defRPr>
-            </a:pPr>
-            <a:r>
-              <a:t>Can detect curvature without extra runs</a:t>
-            </a:r>
-          </a:p>
-          <a:p>
-            <a:pPr lvl="1">
-              <a:spcAft>
-                <a:spcPts val="800"/>
-              </a:spcAft>
-              <a:defRPr sz="1900">
-                <a:solidFill>
-                  <a:srgbClr val="222222"/>
-                </a:solidFill>
-                <a:latin typeface="Calibri"/>
-              </a:defRPr>
-            </a:pPr>
-            <a:r>
-              <a:t>Supported for 3+ continuous factors</a:t>
-            </a:r>
-          </a:p>
-          <a:p>
-            <a:pPr>
-              <a:spcAft>
-                <a:spcPts val="800"/>
-              </a:spcAft>
-              <a:defRPr sz="2200" b="0">
-                <a:solidFill>
-                  <a:srgbClr val="222222"/>
-                </a:solidFill>
-                <a:latin typeface="Calibri"/>
-              </a:defRPr>
-            </a:pPr>
-            <a:r>
-              <a:t>doe-helper: set "type": "definitive_screening"</a:t>
+            <a:pPr algn="l">
+              <a:defRPr sz="1400" b="0">
+                <a:solidFill>
+                  <a:srgbClr val="666666"/>
+                </a:solidFill>
+                <a:latin typeface="Inter"/>
+              </a:defRPr>
+            </a:pPr>
+            <a:r>
+              <a:t>doe augment extends an existing design without starting over</a:t>
+            </a:r>
+          </a:p>
+        </p:txBody>
+      </p:sp>
+      <p:sp>
+        <p:nvSpPr>
+          <p:cNvPr id="8" name="TextBox 7"/>
+          <p:cNvSpPr txBox="1"/>
+          <p:nvPr/>
+        </p:nvSpPr>
+        <p:spPr>
+          <a:xfrm>
+            <a:off x="731520" y="6400800"/>
+            <a:ext cx="10058400" cy="365760"/>
+          </a:xfrm>
+          <a:prstGeom prst="rect">
+            <a:avLst/>
+          </a:prstGeom>
+          <a:noFill/>
+        </p:spPr>
+        <p:txBody>
+          <a:bodyPr wrap="square">
+            <a:spAutoFit/>
+          </a:bodyPr>
+          <a:lstStyle/>
+          <a:p>
+            <a:pPr algn="l">
+              <a:defRPr sz="1000" b="0">
+                <a:solidFill>
+                  <a:srgbClr val="999999"/>
+                </a:solidFill>
+                <a:latin typeface="Consolas"/>
+              </a:defRPr>
+            </a:pPr>
+            <a:r>
+              <a:t>© 2026 Martin J. Gallagher  |  GPL-3.0-or-later  |  doehelper.com</a:t>
             </a:r>
           </a:p>
         </p:txBody>
@@ -6922,7 +6993,7 @@
     <p:bg>
       <p:bgPr>
         <a:solidFill>
-          <a:srgbClr val="FFFFFF"/>
+          <a:srgbClr val="1E1B4B"/>
         </a:solidFill>
         <a:effectLst/>
       </p:bgPr>
@@ -6942,14 +7013,14 @@
         </p:nvSpPr>
         <p:spPr>
           <a:xfrm>
-            <a:off x="0" y="0"/>
-            <a:ext cx="12191695" cy="54864"/>
+            <a:off x="3657600" y="0"/>
+            <a:ext cx="4572000" cy="6858000"/>
           </a:xfrm>
           <a:prstGeom prst="rect">
             <a:avLst/>
           </a:prstGeom>
           <a:solidFill>
-            <a:srgbClr val="007BFF"/>
+            <a:srgbClr val="312E81"/>
           </a:solidFill>
           <a:ln>
             <a:noFill/>
@@ -6979,14 +7050,57 @@
       </p:sp>
       <p:sp>
         <p:nvSpPr>
-          <p:cNvPr id="3" name="TextBox 2"/>
+          <p:cNvPr id="3" name="Rectangle 2"/>
+          <p:cNvSpPr/>
+          <p:nvPr/>
+        </p:nvSpPr>
+        <p:spPr>
+          <a:xfrm>
+            <a:off x="8229600" y="0"/>
+            <a:ext cx="3962095" cy="6858000"/>
+          </a:xfrm>
+          <a:prstGeom prst="rect">
+            <a:avLst/>
+          </a:prstGeom>
+          <a:solidFill>
+            <a:srgbClr val="4338CA"/>
+          </a:solidFill>
+          <a:ln>
+            <a:noFill/>
+          </a:ln>
+        </p:spPr>
+        <p:style>
+          <a:lnRef idx="1">
+            <a:schemeClr val="accent1"/>
+          </a:lnRef>
+          <a:fillRef idx="3">
+            <a:schemeClr val="accent1"/>
+          </a:fillRef>
+          <a:effectRef idx="2">
+            <a:schemeClr val="accent1"/>
+          </a:effectRef>
+          <a:fontRef idx="minor">
+            <a:schemeClr val="lt1"/>
+          </a:fontRef>
+        </p:style>
+        <p:txBody>
+          <a:bodyPr rtlCol="0" anchor="ctr"/>
+          <a:lstStyle/>
+          <a:p>
+            <a:pPr algn="ctr"/>
+          </a:p>
+        </p:txBody>
+      </p:sp>
+      <p:sp>
+        <p:nvSpPr>
+          <p:cNvPr id="4" name="TextBox 3"/>
           <p:cNvSpPr txBox="1"/>
           <p:nvPr/>
         </p:nvSpPr>
         <p:spPr>
           <a:xfrm>
             <a:off x="731520" y="365760"/>
-            <a:ext cx="10515600" cy="822960"/>
+            <a:ext cx="10058400" cy="640080"/>
           </a:xfrm>
           <a:prstGeom prst="rect">
             <a:avLst/>
@@ -6999,30 +7113,640 @@
           </a:bodyPr>
           <a:lstStyle/>
           <a:p>
-            <a:pPr>
-              <a:defRPr sz="3200" b="1">
-                <a:solidFill>
-                  <a:srgbClr val="222222"/>
-                </a:solidFill>
-                <a:latin typeface="Calibri"/>
-              </a:defRPr>
-            </a:pPr>
-            <a:r>
-              <a:t>Choosing a Screening Design</a:t>
-            </a:r>
-          </a:p>
-        </p:txBody>
-      </p:sp>
-      <p:sp>
-        <p:nvSpPr>
-          <p:cNvPr id="4" name="TextBox 3"/>
+            <a:pPr algn="l">
+              <a:defRPr sz="3000" b="1">
+                <a:solidFill>
+                  <a:srgbClr val="FFFFFF"/>
+                </a:solidFill>
+                <a:latin typeface="Inter"/>
+              </a:defRPr>
+            </a:pPr>
+            <a:r>
+              <a:t>Key Takeaways</a:t>
+            </a:r>
+          </a:p>
+        </p:txBody>
+      </p:sp>
+      <p:sp>
+        <p:nvSpPr>
+          <p:cNvPr id="5" name="Rounded Rectangle 4"/>
+          <p:cNvSpPr/>
+          <p:nvPr/>
+        </p:nvSpPr>
+        <p:spPr>
+          <a:xfrm>
+            <a:off x="731520" y="1280160"/>
+            <a:ext cx="10515600" cy="777240"/>
+          </a:xfrm>
+          <a:prstGeom prst="roundRect">
+            <a:avLst/>
+          </a:prstGeom>
+          <a:solidFill>
+            <a:srgbClr val="312E81"/>
+          </a:solidFill>
+          <a:ln>
+            <a:noFill/>
+          </a:ln>
+        </p:spPr>
+        <p:style>
+          <a:lnRef idx="1">
+            <a:schemeClr val="accent1"/>
+          </a:lnRef>
+          <a:fillRef idx="3">
+            <a:schemeClr val="accent1"/>
+          </a:fillRef>
+          <a:effectRef idx="2">
+            <a:schemeClr val="accent1"/>
+          </a:effectRef>
+          <a:fontRef idx="minor">
+            <a:schemeClr val="lt1"/>
+          </a:fontRef>
+        </p:style>
+        <p:txBody>
+          <a:bodyPr rtlCol="0" anchor="ctr"/>
+          <a:lstStyle/>
+          <a:p>
+            <a:pPr algn="ctr"/>
+          </a:p>
+        </p:txBody>
+      </p:sp>
+      <p:sp>
+        <p:nvSpPr>
+          <p:cNvPr id="6" name="Oval 5"/>
+          <p:cNvSpPr/>
+          <p:nvPr/>
+        </p:nvSpPr>
+        <p:spPr>
+          <a:xfrm>
+            <a:off x="1005840" y="1508760"/>
+            <a:ext cx="320040" cy="320040"/>
+          </a:xfrm>
+          <a:prstGeom prst="ellipse">
+            <a:avLst/>
+          </a:prstGeom>
+          <a:solidFill>
+            <a:srgbClr val="5046E5"/>
+          </a:solidFill>
+          <a:ln>
+            <a:noFill/>
+          </a:ln>
+        </p:spPr>
+        <p:style>
+          <a:lnRef idx="1">
+            <a:schemeClr val="accent1"/>
+          </a:lnRef>
+          <a:fillRef idx="3">
+            <a:schemeClr val="accent1"/>
+          </a:fillRef>
+          <a:effectRef idx="2">
+            <a:schemeClr val="accent1"/>
+          </a:effectRef>
+          <a:fontRef idx="minor">
+            <a:schemeClr val="lt1"/>
+          </a:fontRef>
+        </p:style>
+        <p:txBody>
+          <a:bodyPr rtlCol="0" anchor="ctr"/>
+          <a:lstStyle/>
+          <a:p>
+            <a:pPr algn="ctr"/>
+          </a:p>
+        </p:txBody>
+      </p:sp>
+      <p:sp>
+        <p:nvSpPr>
+          <p:cNvPr id="7" name="TextBox 6"/>
           <p:cNvSpPr txBox="1"/>
           <p:nvPr/>
         </p:nvSpPr>
         <p:spPr>
           <a:xfrm>
-            <a:off x="914400" y="1463040"/>
-            <a:ext cx="10058400" cy="4754880"/>
+            <a:off x="1554480" y="1325880"/>
+            <a:ext cx="9418320" cy="777240"/>
+          </a:xfrm>
+          <a:prstGeom prst="rect">
+            <a:avLst/>
+          </a:prstGeom>
+          <a:noFill/>
+        </p:spPr>
+        <p:txBody>
+          <a:bodyPr wrap="square" anchor="ctr">
+            <a:spAutoFit/>
+          </a:bodyPr>
+          <a:lstStyle/>
+          <a:p>
+            <a:pPr algn="l">
+              <a:defRPr sz="1800" b="0">
+                <a:solidFill>
+                  <a:srgbClr val="FFFFFF"/>
+                </a:solidFill>
+                <a:latin typeface="Inter"/>
+              </a:defRPr>
+            </a:pPr>
+            <a:r>
+              <a:t>Fractional factorials trade runs for information (aliasing)</a:t>
+            </a:r>
+          </a:p>
+        </p:txBody>
+      </p:sp>
+      <p:sp>
+        <p:nvSpPr>
+          <p:cNvPr id="8" name="Rounded Rectangle 7"/>
+          <p:cNvSpPr/>
+          <p:nvPr/>
+        </p:nvSpPr>
+        <p:spPr>
+          <a:xfrm>
+            <a:off x="731520" y="2167128"/>
+            <a:ext cx="10515600" cy="777240"/>
+          </a:xfrm>
+          <a:prstGeom prst="roundRect">
+            <a:avLst/>
+          </a:prstGeom>
+          <a:solidFill>
+            <a:srgbClr val="312E81"/>
+          </a:solidFill>
+          <a:ln>
+            <a:noFill/>
+          </a:ln>
+        </p:spPr>
+        <p:style>
+          <a:lnRef idx="1">
+            <a:schemeClr val="accent1"/>
+          </a:lnRef>
+          <a:fillRef idx="3">
+            <a:schemeClr val="accent1"/>
+          </a:fillRef>
+          <a:effectRef idx="2">
+            <a:schemeClr val="accent1"/>
+          </a:effectRef>
+          <a:fontRef idx="minor">
+            <a:schemeClr val="lt1"/>
+          </a:fontRef>
+        </p:style>
+        <p:txBody>
+          <a:bodyPr rtlCol="0" anchor="ctr"/>
+          <a:lstStyle/>
+          <a:p>
+            <a:pPr algn="ctr"/>
+          </a:p>
+        </p:txBody>
+      </p:sp>
+      <p:sp>
+        <p:nvSpPr>
+          <p:cNvPr id="9" name="Oval 8"/>
+          <p:cNvSpPr/>
+          <p:nvPr/>
+        </p:nvSpPr>
+        <p:spPr>
+          <a:xfrm>
+            <a:off x="1005840" y="2395728"/>
+            <a:ext cx="320040" cy="320040"/>
+          </a:xfrm>
+          <a:prstGeom prst="ellipse">
+            <a:avLst/>
+          </a:prstGeom>
+          <a:solidFill>
+            <a:srgbClr val="5046E5"/>
+          </a:solidFill>
+          <a:ln>
+            <a:noFill/>
+          </a:ln>
+        </p:spPr>
+        <p:style>
+          <a:lnRef idx="1">
+            <a:schemeClr val="accent1"/>
+          </a:lnRef>
+          <a:fillRef idx="3">
+            <a:schemeClr val="accent1"/>
+          </a:fillRef>
+          <a:effectRef idx="2">
+            <a:schemeClr val="accent1"/>
+          </a:effectRef>
+          <a:fontRef idx="minor">
+            <a:schemeClr val="lt1"/>
+          </a:fontRef>
+        </p:style>
+        <p:txBody>
+          <a:bodyPr rtlCol="0" anchor="ctr"/>
+          <a:lstStyle/>
+          <a:p>
+            <a:pPr algn="ctr"/>
+          </a:p>
+        </p:txBody>
+      </p:sp>
+      <p:sp>
+        <p:nvSpPr>
+          <p:cNvPr id="10" name="TextBox 9"/>
+          <p:cNvSpPr txBox="1"/>
+          <p:nvPr/>
+        </p:nvSpPr>
+        <p:spPr>
+          <a:xfrm>
+            <a:off x="1554480" y="2212848"/>
+            <a:ext cx="9418320" cy="777240"/>
+          </a:xfrm>
+          <a:prstGeom prst="rect">
+            <a:avLst/>
+          </a:prstGeom>
+          <a:noFill/>
+        </p:spPr>
+        <p:txBody>
+          <a:bodyPr wrap="square" anchor="ctr">
+            <a:spAutoFit/>
+          </a:bodyPr>
+          <a:lstStyle/>
+          <a:p>
+            <a:pPr algn="l">
+              <a:defRPr sz="1800" b="0">
+                <a:solidFill>
+                  <a:srgbClr val="FFFFFF"/>
+                </a:solidFill>
+                <a:latin typeface="Inter"/>
+              </a:defRPr>
+            </a:pPr>
+            <a:r>
+              <a:t>Resolution tells you what's confounded with what</a:t>
+            </a:r>
+          </a:p>
+        </p:txBody>
+      </p:sp>
+      <p:sp>
+        <p:nvSpPr>
+          <p:cNvPr id="11" name="Rounded Rectangle 10"/>
+          <p:cNvSpPr/>
+          <p:nvPr/>
+        </p:nvSpPr>
+        <p:spPr>
+          <a:xfrm>
+            <a:off x="731520" y="3054096"/>
+            <a:ext cx="10515600" cy="777240"/>
+          </a:xfrm>
+          <a:prstGeom prst="roundRect">
+            <a:avLst/>
+          </a:prstGeom>
+          <a:solidFill>
+            <a:srgbClr val="312E81"/>
+          </a:solidFill>
+          <a:ln>
+            <a:noFill/>
+          </a:ln>
+        </p:spPr>
+        <p:style>
+          <a:lnRef idx="1">
+            <a:schemeClr val="accent1"/>
+          </a:lnRef>
+          <a:fillRef idx="3">
+            <a:schemeClr val="accent1"/>
+          </a:fillRef>
+          <a:effectRef idx="2">
+            <a:schemeClr val="accent1"/>
+          </a:effectRef>
+          <a:fontRef idx="minor">
+            <a:schemeClr val="lt1"/>
+          </a:fontRef>
+        </p:style>
+        <p:txBody>
+          <a:bodyPr rtlCol="0" anchor="ctr"/>
+          <a:lstStyle/>
+          <a:p>
+            <a:pPr algn="ctr"/>
+          </a:p>
+        </p:txBody>
+      </p:sp>
+      <p:sp>
+        <p:nvSpPr>
+          <p:cNvPr id="12" name="Oval 11"/>
+          <p:cNvSpPr/>
+          <p:nvPr/>
+        </p:nvSpPr>
+        <p:spPr>
+          <a:xfrm>
+            <a:off x="1005840" y="3282696"/>
+            <a:ext cx="320040" cy="320040"/>
+          </a:xfrm>
+          <a:prstGeom prst="ellipse">
+            <a:avLst/>
+          </a:prstGeom>
+          <a:solidFill>
+            <a:srgbClr val="5046E5"/>
+          </a:solidFill>
+          <a:ln>
+            <a:noFill/>
+          </a:ln>
+        </p:spPr>
+        <p:style>
+          <a:lnRef idx="1">
+            <a:schemeClr val="accent1"/>
+          </a:lnRef>
+          <a:fillRef idx="3">
+            <a:schemeClr val="accent1"/>
+          </a:fillRef>
+          <a:effectRef idx="2">
+            <a:schemeClr val="accent1"/>
+          </a:effectRef>
+          <a:fontRef idx="minor">
+            <a:schemeClr val="lt1"/>
+          </a:fontRef>
+        </p:style>
+        <p:txBody>
+          <a:bodyPr rtlCol="0" anchor="ctr"/>
+          <a:lstStyle/>
+          <a:p>
+            <a:pPr algn="ctr"/>
+          </a:p>
+        </p:txBody>
+      </p:sp>
+      <p:sp>
+        <p:nvSpPr>
+          <p:cNvPr id="13" name="TextBox 12"/>
+          <p:cNvSpPr txBox="1"/>
+          <p:nvPr/>
+        </p:nvSpPr>
+        <p:spPr>
+          <a:xfrm>
+            <a:off x="1554480" y="3099816"/>
+            <a:ext cx="9418320" cy="777240"/>
+          </a:xfrm>
+          <a:prstGeom prst="rect">
+            <a:avLst/>
+          </a:prstGeom>
+          <a:noFill/>
+        </p:spPr>
+        <p:txBody>
+          <a:bodyPr wrap="square" anchor="ctr">
+            <a:spAutoFit/>
+          </a:bodyPr>
+          <a:lstStyle/>
+          <a:p>
+            <a:pPr algn="l">
+              <a:defRPr sz="1800" b="0">
+                <a:solidFill>
+                  <a:srgbClr val="FFFFFF"/>
+                </a:solidFill>
+                <a:latin typeface="Inter"/>
+              </a:defRPr>
+            </a:pPr>
+            <a:r>
+              <a:t>Plackett-Burman: maximum screening efficiency</a:t>
+            </a:r>
+          </a:p>
+        </p:txBody>
+      </p:sp>
+      <p:sp>
+        <p:nvSpPr>
+          <p:cNvPr id="14" name="Rounded Rectangle 13"/>
+          <p:cNvSpPr/>
+          <p:nvPr/>
+        </p:nvSpPr>
+        <p:spPr>
+          <a:xfrm>
+            <a:off x="731520" y="3941064"/>
+            <a:ext cx="10515600" cy="777240"/>
+          </a:xfrm>
+          <a:prstGeom prst="roundRect">
+            <a:avLst/>
+          </a:prstGeom>
+          <a:solidFill>
+            <a:srgbClr val="312E81"/>
+          </a:solidFill>
+          <a:ln>
+            <a:noFill/>
+          </a:ln>
+        </p:spPr>
+        <p:style>
+          <a:lnRef idx="1">
+            <a:schemeClr val="accent1"/>
+          </a:lnRef>
+          <a:fillRef idx="3">
+            <a:schemeClr val="accent1"/>
+          </a:fillRef>
+          <a:effectRef idx="2">
+            <a:schemeClr val="accent1"/>
+          </a:effectRef>
+          <a:fontRef idx="minor">
+            <a:schemeClr val="lt1"/>
+          </a:fontRef>
+        </p:style>
+        <p:txBody>
+          <a:bodyPr rtlCol="0" anchor="ctr"/>
+          <a:lstStyle/>
+          <a:p>
+            <a:pPr algn="ctr"/>
+          </a:p>
+        </p:txBody>
+      </p:sp>
+      <p:sp>
+        <p:nvSpPr>
+          <p:cNvPr id="15" name="Oval 14"/>
+          <p:cNvSpPr/>
+          <p:nvPr/>
+        </p:nvSpPr>
+        <p:spPr>
+          <a:xfrm>
+            <a:off x="1005840" y="4169664"/>
+            <a:ext cx="320040" cy="320040"/>
+          </a:xfrm>
+          <a:prstGeom prst="ellipse">
+            <a:avLst/>
+          </a:prstGeom>
+          <a:solidFill>
+            <a:srgbClr val="5046E5"/>
+          </a:solidFill>
+          <a:ln>
+            <a:noFill/>
+          </a:ln>
+        </p:spPr>
+        <p:style>
+          <a:lnRef idx="1">
+            <a:schemeClr val="accent1"/>
+          </a:lnRef>
+          <a:fillRef idx="3">
+            <a:schemeClr val="accent1"/>
+          </a:fillRef>
+          <a:effectRef idx="2">
+            <a:schemeClr val="accent1"/>
+          </a:effectRef>
+          <a:fontRef idx="minor">
+            <a:schemeClr val="lt1"/>
+          </a:fontRef>
+        </p:style>
+        <p:txBody>
+          <a:bodyPr rtlCol="0" anchor="ctr"/>
+          <a:lstStyle/>
+          <a:p>
+            <a:pPr algn="ctr"/>
+          </a:p>
+        </p:txBody>
+      </p:sp>
+      <p:sp>
+        <p:nvSpPr>
+          <p:cNvPr id="16" name="TextBox 15"/>
+          <p:cNvSpPr txBox="1"/>
+          <p:nvPr/>
+        </p:nvSpPr>
+        <p:spPr>
+          <a:xfrm>
+            <a:off x="1554480" y="3986784"/>
+            <a:ext cx="9418320" cy="777240"/>
+          </a:xfrm>
+          <a:prstGeom prst="rect">
+            <a:avLst/>
+          </a:prstGeom>
+          <a:noFill/>
+        </p:spPr>
+        <p:txBody>
+          <a:bodyPr wrap="square" anchor="ctr">
+            <a:spAutoFit/>
+          </a:bodyPr>
+          <a:lstStyle/>
+          <a:p>
+            <a:pPr algn="l">
+              <a:defRPr sz="1800" b="0">
+                <a:solidFill>
+                  <a:srgbClr val="FFFFFF"/>
+                </a:solidFill>
+                <a:latin typeface="Inter"/>
+              </a:defRPr>
+            </a:pPr>
+            <a:r>
+              <a:t>Definitive Screening: modern, cleaner main-effect estimates</a:t>
+            </a:r>
+          </a:p>
+        </p:txBody>
+      </p:sp>
+      <p:sp>
+        <p:nvSpPr>
+          <p:cNvPr id="17" name="Rounded Rectangle 16"/>
+          <p:cNvSpPr/>
+          <p:nvPr/>
+        </p:nvSpPr>
+        <p:spPr>
+          <a:xfrm>
+            <a:off x="731520" y="4828032"/>
+            <a:ext cx="10515600" cy="777240"/>
+          </a:xfrm>
+          <a:prstGeom prst="roundRect">
+            <a:avLst/>
+          </a:prstGeom>
+          <a:solidFill>
+            <a:srgbClr val="312E81"/>
+          </a:solidFill>
+          <a:ln>
+            <a:noFill/>
+          </a:ln>
+        </p:spPr>
+        <p:style>
+          <a:lnRef idx="1">
+            <a:schemeClr val="accent1"/>
+          </a:lnRef>
+          <a:fillRef idx="3">
+            <a:schemeClr val="accent1"/>
+          </a:fillRef>
+          <a:effectRef idx="2">
+            <a:schemeClr val="accent1"/>
+          </a:effectRef>
+          <a:fontRef idx="minor">
+            <a:schemeClr val="lt1"/>
+          </a:fontRef>
+        </p:style>
+        <p:txBody>
+          <a:bodyPr rtlCol="0" anchor="ctr"/>
+          <a:lstStyle/>
+          <a:p>
+            <a:pPr algn="ctr"/>
+          </a:p>
+        </p:txBody>
+      </p:sp>
+      <p:sp>
+        <p:nvSpPr>
+          <p:cNvPr id="18" name="Oval 17"/>
+          <p:cNvSpPr/>
+          <p:nvPr/>
+        </p:nvSpPr>
+        <p:spPr>
+          <a:xfrm>
+            <a:off x="1005840" y="5056632"/>
+            <a:ext cx="320040" cy="320040"/>
+          </a:xfrm>
+          <a:prstGeom prst="ellipse">
+            <a:avLst/>
+          </a:prstGeom>
+          <a:solidFill>
+            <a:srgbClr val="5046E5"/>
+          </a:solidFill>
+          <a:ln>
+            <a:noFill/>
+          </a:ln>
+        </p:spPr>
+        <p:style>
+          <a:lnRef idx="1">
+            <a:schemeClr val="accent1"/>
+          </a:lnRef>
+          <a:fillRef idx="3">
+            <a:schemeClr val="accent1"/>
+          </a:fillRef>
+          <a:effectRef idx="2">
+            <a:schemeClr val="accent1"/>
+          </a:effectRef>
+          <a:fontRef idx="minor">
+            <a:schemeClr val="lt1"/>
+          </a:fontRef>
+        </p:style>
+        <p:txBody>
+          <a:bodyPr rtlCol="0" anchor="ctr"/>
+          <a:lstStyle/>
+          <a:p>
+            <a:pPr algn="ctr"/>
+          </a:p>
+        </p:txBody>
+      </p:sp>
+      <p:sp>
+        <p:nvSpPr>
+          <p:cNvPr id="19" name="TextBox 18"/>
+          <p:cNvSpPr txBox="1"/>
+          <p:nvPr/>
+        </p:nvSpPr>
+        <p:spPr>
+          <a:xfrm>
+            <a:off x="1554480" y="4873752"/>
+            <a:ext cx="9418320" cy="777240"/>
+          </a:xfrm>
+          <a:prstGeom prst="rect">
+            <a:avLst/>
+          </a:prstGeom>
+          <a:noFill/>
+        </p:spPr>
+        <p:txBody>
+          <a:bodyPr wrap="square" anchor="ctr">
+            <a:spAutoFit/>
+          </a:bodyPr>
+          <a:lstStyle/>
+          <a:p>
+            <a:pPr algn="l">
+              <a:defRPr sz="1800" b="0">
+                <a:solidFill>
+                  <a:srgbClr val="FFFFFF"/>
+                </a:solidFill>
+                <a:latin typeface="Inter"/>
+              </a:defRPr>
+            </a:pPr>
+            <a:r>
+              <a:t>doe augment extends designs with fold-overs and star points</a:t>
+            </a:r>
+          </a:p>
+        </p:txBody>
+      </p:sp>
+      <p:sp>
+        <p:nvSpPr>
+          <p:cNvPr id="20" name="TextBox 19"/>
+          <p:cNvSpPr txBox="1"/>
+          <p:nvPr/>
+        </p:nvSpPr>
+        <p:spPr>
+          <a:xfrm>
+            <a:off x="731520" y="6400800"/>
+            <a:ext cx="10058400" cy="365760"/>
           </a:xfrm>
           <a:prstGeom prst="rect">
             <a:avLst/>
@@ -7035,144 +7759,16 @@
           </a:bodyPr>
           <a:lstStyle/>
           <a:p>
-            <a:pPr>
-              <a:spcAft>
-                <a:spcPts val="800"/>
-              </a:spcAft>
-              <a:defRPr sz="2200" b="0">
-                <a:solidFill>
-                  <a:srgbClr val="222222"/>
-                </a:solidFill>
-                <a:latin typeface="Calibri"/>
-              </a:defRPr>
-            </a:pPr>
-            <a:r>
-              <a:t>Plackett-Burman: maximum economy, many factors, need follow-up</a:t>
-            </a:r>
-          </a:p>
-          <a:p>
-            <a:pPr>
-              <a:spcAft>
-                <a:spcPts val="800"/>
-              </a:spcAft>
-              <a:defRPr sz="2200" b="0">
-                <a:solidFill>
-                  <a:srgbClr val="222222"/>
-                </a:solidFill>
-                <a:latin typeface="Calibri"/>
-              </a:defRPr>
-            </a:pPr>
-            <a:r>
-              <a:t>Definitive Screening: slightly more runs, cleaner estimates</a:t>
-            </a:r>
-          </a:p>
-          <a:p>
-            <a:pPr>
-              <a:spcAft>
-                <a:spcPts val="800"/>
-              </a:spcAft>
-              <a:defRPr sz="2200" b="0">
-                <a:solidFill>
-                  <a:srgbClr val="222222"/>
-                </a:solidFill>
-                <a:latin typeface="Calibri"/>
-              </a:defRPr>
-            </a:pPr>
-            <a:r>
-              <a:t>Fractional Factorial: when you need specific resolution</a:t>
-            </a:r>
-          </a:p>
-          <a:p>
-            <a:pPr>
-              <a:spcAft>
-                <a:spcPts val="800"/>
-              </a:spcAft>
-              <a:defRPr sz="2200" b="0">
-                <a:solidFill>
-                  <a:srgbClr val="222222"/>
-                </a:solidFill>
-                <a:latin typeface="Calibri"/>
-              </a:defRPr>
-            </a:pPr>
-          </a:p>
-          <a:p>
-            <a:pPr>
-              <a:spcAft>
-                <a:spcPts val="800"/>
-              </a:spcAft>
-              <a:defRPr sz="2200" b="0">
-                <a:solidFill>
-                  <a:srgbClr val="222222"/>
-                </a:solidFill>
-                <a:latin typeface="Calibri"/>
-              </a:defRPr>
-            </a:pPr>
-            <a:r>
-              <a:t>Decision guide:</a:t>
-            </a:r>
-          </a:p>
-          <a:p>
-            <a:pPr lvl="1">
-              <a:spcAft>
-                <a:spcPts val="800"/>
-              </a:spcAft>
-              <a:defRPr sz="1900">
-                <a:solidFill>
-                  <a:srgbClr val="222222"/>
-                </a:solidFill>
-                <a:latin typeface="Calibri"/>
-              </a:defRPr>
-            </a:pPr>
-            <a:r>
-              <a:t>&gt; 6 factors, tight budget -&gt; Plackett-Burman or DSD</a:t>
-            </a:r>
-          </a:p>
-          <a:p>
-            <a:pPr lvl="1">
-              <a:spcAft>
-                <a:spcPts val="800"/>
-              </a:spcAft>
-              <a:defRPr sz="1900">
-                <a:solidFill>
-                  <a:srgbClr val="222222"/>
-                </a:solidFill>
-                <a:latin typeface="Calibri"/>
-              </a:defRPr>
-            </a:pPr>
-            <a:r>
-              <a:t>4-6 factors, moderate budget -&gt; Fractional Factorial (Res IV+)</a:t>
-            </a:r>
-          </a:p>
-          <a:p>
-            <a:pPr lvl="1">
-              <a:spcAft>
-                <a:spcPts val="800"/>
-              </a:spcAft>
-              <a:defRPr sz="1900">
-                <a:solidFill>
-                  <a:srgbClr val="222222"/>
-                </a:solidFill>
-                <a:latin typeface="Calibri"/>
-              </a:defRPr>
-            </a:pPr>
-            <a:r>
-              <a:t>&lt;= 5 factors, can afford it -&gt; Full Factorial</a:t>
-            </a:r>
-          </a:p>
-          <a:p>
-            <a:pPr>
-              <a:spcAft>
-                <a:spcPts val="800"/>
-              </a:spcAft>
-              <a:defRPr sz="2200" b="0">
-                <a:solidFill>
-                  <a:srgbClr val="222222"/>
-                </a:solidFill>
-                <a:latin typeface="Calibri"/>
-              </a:defRPr>
-            </a:pPr>
-            <a:r>
-              <a:t>doe-helper handles the design selection automatically</a:t>
+            <a:pPr algn="l">
+              <a:defRPr sz="1000" b="0">
+                <a:solidFill>
+                  <a:srgbClr val="6366F1"/>
+                </a:solidFill>
+                <a:latin typeface="Consolas"/>
+              </a:defRPr>
+            </a:pPr>
+            <a:r>
+              <a:t>© 2026 Martin J. Gallagher  |  GPL-3.0-or-later</a:t>
             </a:r>
           </a:p>
         </p:txBody>
